--- a/系统专篇/两系统建设进展.pptx
+++ b/系统专篇/两系统建设进展.pptx
@@ -10,6 +10,7 @@
   </p:notesMasterIdLst>
   <p:sldIdLst>
     <p:sldId id="256" r:id="rId3"/>
+    <p:sldId id="257" r:id="rId9"/>
   </p:sldIdLst>
   <p:sldSz cx="12192000" cy="6858000"/>
   <p:notesSz cx="6858000" cy="9144000"/>
@@ -7550,7 +7551,7 @@
         <p:spPr>
           <a:xfrm>
             <a:off x="512065" y="1097282"/>
-            <a:ext cx="11167869" cy="336296"/>
+            <a:ext cx="11167869" cy="366268"/>
           </a:xfrm>
           <a:prstGeom prst="rect">
             <a:avLst/>
@@ -7569,7 +7570,7 @@
               </a:lnSpc>
             </a:pPr>
             <a:r>
-              <a:rPr sz="2000" b="1" i="0">
+              <a:rPr sz="2200" b="1" i="0">
                 <a:solidFill>
                   <a:srgbClr val="16283F"/>
                 </a:solidFill>
@@ -7577,7 +7578,7 @@
                 <a:ea typeface="微软雅黑"/>
                 <a:cs typeface="Arial"/>
               </a:rPr>
-              <a:t>EIMS 完成系统验证具备上线条件，巡检系统隐患台账已归集 3.5 万余条</a:t>
+              <a:t>设备信息管理系统（EIMS）完成系统验证，预计 8 月上线</a:t>
             </a:r>
           </a:p>
         </p:txBody>
@@ -7590,8 +7591,8 @@
         </p:nvSpPr>
         <p:spPr>
           <a:xfrm>
-            <a:off x="512065" y="1579883"/>
-            <a:ext cx="5437630" cy="237744"/>
+            <a:off x="512065" y="1609856"/>
+            <a:ext cx="11167869" cy="201168"/>
           </a:xfrm>
           <a:prstGeom prst="rect">
             <a:avLst/>
@@ -7610,48 +7611,7 @@
               </a:lnSpc>
             </a:pPr>
             <a:r>
-              <a:rPr sz="1500" b="1" i="0">
-                <a:solidFill>
-                  <a:srgbClr val="003669"/>
-                </a:solidFill>
-                <a:latin typeface="Arial"/>
-                <a:ea typeface="微软雅黑"/>
-                <a:cs typeface="Arial"/>
-              </a:rPr>
-              <a:t>设备信息管理系统（EIMS）</a:t>
-            </a:r>
-          </a:p>
-        </p:txBody>
-      </p:sp>
-      <p:sp>
-        <p:nvSpPr>
-          <p:cNvPr id="4" name="TextBox 3"/>
-          <p:cNvSpPr txBox="1"/>
-          <p:nvPr/>
-        </p:nvSpPr>
-        <p:spPr>
-          <a:xfrm>
-            <a:off x="512065" y="1826772"/>
-            <a:ext cx="5437630" cy="182880"/>
-          </a:xfrm>
-          <a:prstGeom prst="rect">
-            <a:avLst/>
-          </a:prstGeom>
-          <a:noFill/>
-        </p:spPr>
-        <p:txBody>
-          <a:bodyPr wrap="square" lIns="0" rIns="0" tIns="0" bIns="0" anchor="t">
-            <a:spAutoFit/>
-          </a:bodyPr>
-          <a:lstStyle/>
-          <a:p>
-            <a:pPr algn="l">
-              <a:lnSpc>
-                <a:spcPct val="128000"/>
-              </a:lnSpc>
-            </a:pPr>
-            <a:r>
-              <a:rPr sz="900" b="1" i="0">
+              <a:rPr sz="1100" b="1" i="0">
                 <a:solidFill>
                   <a:srgbClr val="4E6584"/>
                 </a:solidFill>
@@ -7666,14 +7626,14 @@
       </p:sp>
       <p:sp>
         <p:nvSpPr>
-          <p:cNvPr id="5" name="Rectangle 4"/>
+          <p:cNvPr id="4" name="Rectangle 3"/>
           <p:cNvSpPr/>
           <p:nvPr/>
         </p:nvSpPr>
         <p:spPr>
           <a:xfrm>
-            <a:off x="512065" y="1982220"/>
-            <a:ext cx="50292" cy="182880"/>
+            <a:off x="512065" y="1902464"/>
+            <a:ext cx="50292" cy="201168"/>
           </a:xfrm>
           <a:prstGeom prst="rect">
             <a:avLst/>
@@ -7710,14 +7670,14 @@
       </p:sp>
       <p:sp>
         <p:nvSpPr>
-          <p:cNvPr id="6" name="TextBox 5"/>
+          <p:cNvPr id="5" name="TextBox 4"/>
           <p:cNvSpPr txBox="1"/>
           <p:nvPr/>
         </p:nvSpPr>
         <p:spPr>
           <a:xfrm>
-            <a:off x="658369" y="1963932"/>
-            <a:ext cx="5291325" cy="219456"/>
+            <a:off x="658369" y="1884176"/>
+            <a:ext cx="11021565" cy="237744"/>
           </a:xfrm>
           <a:prstGeom prst="rect">
             <a:avLst/>
@@ -7736,7 +7696,7 @@
               </a:lnSpc>
             </a:pPr>
             <a:r>
-              <a:rPr sz="1300" b="1" i="0">
+              <a:rPr sz="1400" b="1" i="0">
                 <a:solidFill>
                   <a:srgbClr val="003669"/>
                 </a:solidFill>
@@ -7751,14 +7711,14 @@
       </p:sp>
       <p:sp>
         <p:nvSpPr>
-          <p:cNvPr id="7" name="Rounded Rectangle 6"/>
+          <p:cNvPr id="6" name="Rounded Rectangle 5"/>
           <p:cNvSpPr/>
           <p:nvPr/>
         </p:nvSpPr>
         <p:spPr>
           <a:xfrm>
-            <a:off x="512065" y="2201677"/>
-            <a:ext cx="2645662" cy="713233"/>
+            <a:off x="512065" y="2176785"/>
+            <a:ext cx="5492494" cy="914402"/>
           </a:xfrm>
           <a:prstGeom prst="roundRect">
             <a:avLst>
@@ -7797,14 +7757,14 @@
       </p:sp>
       <p:sp>
         <p:nvSpPr>
-          <p:cNvPr id="8" name="TextBox 7"/>
+          <p:cNvPr id="7" name="TextBox 6"/>
           <p:cNvSpPr txBox="1"/>
           <p:nvPr/>
         </p:nvSpPr>
         <p:spPr>
           <a:xfrm>
-            <a:off x="658369" y="2320549"/>
-            <a:ext cx="2353054" cy="166687"/>
+            <a:off x="694945" y="2286513"/>
+            <a:ext cx="5126733" cy="190500"/>
           </a:xfrm>
           <a:prstGeom prst="rect">
             <a:avLst/>
@@ -7819,11 +7779,11 @@
           <a:p>
             <a:pPr algn="l">
               <a:lnSpc>
-                <a:spcPct val="125000"/>
+                <a:spcPct val="120000"/>
               </a:lnSpc>
             </a:pPr>
             <a:r>
-              <a:rPr sz="1050" b="1" i="0">
+              <a:rPr sz="1250" b="1" i="0">
                 <a:solidFill>
                   <a:srgbClr val="003669"/>
                 </a:solidFill>
@@ -7831,21 +7791,21 @@
                 <a:ea typeface="微软雅黑"/>
                 <a:cs typeface="Arial"/>
               </a:rPr>
-              <a:t>EIMS 完成验证 · 设备预防性维护</a:t>
-            </a:r>
-          </a:p>
-        </p:txBody>
-      </p:sp>
-      <p:sp>
-        <p:nvSpPr>
-          <p:cNvPr id="9" name="TextBox 8"/>
+              <a:t>设备信息管理系统 (EIMS）完成验证 - 设备预防性维护</a:t>
+            </a:r>
+          </a:p>
+        </p:txBody>
+      </p:sp>
+      <p:sp>
+        <p:nvSpPr>
+          <p:cNvPr id="8" name="TextBox 7"/>
           <p:cNvSpPr txBox="1"/>
           <p:nvPr/>
         </p:nvSpPr>
         <p:spPr>
           <a:xfrm>
-            <a:off x="658369" y="2532957"/>
-            <a:ext cx="2353054" cy="263081"/>
+            <a:off x="694945" y="2531878"/>
+            <a:ext cx="5126733" cy="449581"/>
           </a:xfrm>
           <a:prstGeom prst="rect">
             <a:avLst/>
@@ -7860,11 +7820,11 @@
           <a:p>
             <a:pPr algn="l">
               <a:lnSpc>
-                <a:spcPct val="134000"/>
+                <a:spcPct val="130000"/>
               </a:lnSpc>
             </a:pPr>
             <a:r>
-              <a:rPr sz="750" b="0" i="0">
+              <a:rPr sz="1100" b="0" i="0">
                 <a:solidFill>
                   <a:srgbClr val="16283F"/>
                 </a:solidFill>
@@ -7879,14 +7839,14 @@
       </p:sp>
       <p:sp>
         <p:nvSpPr>
-          <p:cNvPr id="10" name="Rounded Rectangle 9"/>
+          <p:cNvPr id="9" name="Rounded Rectangle 8"/>
           <p:cNvSpPr/>
           <p:nvPr/>
         </p:nvSpPr>
         <p:spPr>
           <a:xfrm>
-            <a:off x="3304032" y="2201677"/>
-            <a:ext cx="2645662" cy="713233"/>
+            <a:off x="6187440" y="2176785"/>
+            <a:ext cx="5492494" cy="914402"/>
           </a:xfrm>
           <a:prstGeom prst="roundRect">
             <a:avLst>
@@ -7925,14 +7885,14 @@
       </p:sp>
       <p:sp>
         <p:nvSpPr>
-          <p:cNvPr id="11" name="TextBox 10"/>
+          <p:cNvPr id="10" name="TextBox 9"/>
           <p:cNvSpPr txBox="1"/>
           <p:nvPr/>
         </p:nvSpPr>
         <p:spPr>
           <a:xfrm>
-            <a:off x="3450337" y="2320549"/>
-            <a:ext cx="2353054" cy="166687"/>
+            <a:off x="6370320" y="2286513"/>
+            <a:ext cx="5126733" cy="190500"/>
           </a:xfrm>
           <a:prstGeom prst="rect">
             <a:avLst/>
@@ -7947,11 +7907,11 @@
           <a:p>
             <a:pPr algn="l">
               <a:lnSpc>
-                <a:spcPct val="125000"/>
+                <a:spcPct val="120000"/>
               </a:lnSpc>
             </a:pPr>
             <a:r>
-              <a:rPr sz="1050" b="1" i="0">
+              <a:rPr sz="1250" b="1" i="0">
                 <a:solidFill>
                   <a:srgbClr val="003669"/>
                 </a:solidFill>
@@ -7966,14 +7926,14 @@
       </p:sp>
       <p:sp>
         <p:nvSpPr>
-          <p:cNvPr id="12" name="TextBox 11"/>
+          <p:cNvPr id="11" name="TextBox 10"/>
           <p:cNvSpPr txBox="1"/>
           <p:nvPr/>
         </p:nvSpPr>
         <p:spPr>
           <a:xfrm>
-            <a:off x="3450337" y="2532957"/>
-            <a:ext cx="2353054" cy="263081"/>
+            <a:off x="6370320" y="2531878"/>
+            <a:ext cx="5126733" cy="449581"/>
           </a:xfrm>
           <a:prstGeom prst="rect">
             <a:avLst/>
@@ -7988,11 +7948,11 @@
           <a:p>
             <a:pPr algn="l">
               <a:lnSpc>
-                <a:spcPct val="134000"/>
+                <a:spcPct val="130000"/>
               </a:lnSpc>
             </a:pPr>
             <a:r>
-              <a:rPr sz="750" b="0" i="0">
+              <a:rPr sz="1100" b="0" i="0">
                 <a:solidFill>
                   <a:srgbClr val="16283F"/>
                 </a:solidFill>
@@ -8007,14 +7967,14 @@
       </p:sp>
       <p:sp>
         <p:nvSpPr>
-          <p:cNvPr id="13" name="Rectangle 12"/>
+          <p:cNvPr id="12" name="Rectangle 11"/>
           <p:cNvSpPr/>
           <p:nvPr/>
         </p:nvSpPr>
         <p:spPr>
           <a:xfrm>
-            <a:off x="512065" y="3024639"/>
-            <a:ext cx="50292" cy="182880"/>
+            <a:off x="512065" y="3219204"/>
+            <a:ext cx="50292" cy="201168"/>
           </a:xfrm>
           <a:prstGeom prst="rect">
             <a:avLst/>
@@ -8051,14 +8011,14 @@
       </p:sp>
       <p:sp>
         <p:nvSpPr>
-          <p:cNvPr id="14" name="TextBox 13"/>
+          <p:cNvPr id="13" name="TextBox 12"/>
           <p:cNvSpPr txBox="1"/>
           <p:nvPr/>
         </p:nvSpPr>
         <p:spPr>
           <a:xfrm>
-            <a:off x="658369" y="3006351"/>
-            <a:ext cx="5291325" cy="219456"/>
+            <a:off x="658369" y="3200916"/>
+            <a:ext cx="11021565" cy="237744"/>
           </a:xfrm>
           <a:prstGeom prst="rect">
             <a:avLst/>
@@ -8077,7 +8037,7 @@
               </a:lnSpc>
             </a:pPr>
             <a:r>
-              <a:rPr sz="1300" b="1" i="0">
+              <a:rPr sz="1400" b="1" i="0">
                 <a:solidFill>
                   <a:srgbClr val="003669"/>
                 </a:solidFill>
@@ -8090,59 +8050,22 @@
           </a:p>
         </p:txBody>
       </p:sp>
-      <p:cxnSp>
-        <p:nvCxnSpPr>
-          <p:cNvPr id="15" name="Connector 14"/>
-          <p:cNvCxnSpPr/>
+      <p:sp>
+        <p:nvSpPr>
+          <p:cNvPr id="14" name="Chevron 13"/>
+          <p:cNvSpPr/>
           <p:nvPr/>
-        </p:nvCxnSpPr>
-        <p:spPr>
-          <a:xfrm>
-            <a:off x="786385" y="3335536"/>
-            <a:ext cx="0" cy="1316739"/>
-          </a:xfrm>
-          <a:prstGeom prst="line">
+        </p:nvSpPr>
+        <p:spPr>
+          <a:xfrm>
+            <a:off x="512065" y="3493524"/>
+            <a:ext cx="2145791" cy="329184"/>
+          </a:xfrm>
+          <a:prstGeom prst="chevron">
             <a:avLst/>
           </a:prstGeom>
-          <a:ln w="15240">
-            <a:solidFill>
-              <a:srgbClr val="C6D5E6"/>
-            </a:solidFill>
-          </a:ln>
-        </p:spPr>
-        <p:style>
-          <a:lnRef idx="2">
-            <a:schemeClr val="accent1"/>
-          </a:lnRef>
-          <a:fillRef idx="0">
-            <a:schemeClr val="accent1"/>
-          </a:fillRef>
-          <a:effectRef idx="1">
-            <a:schemeClr val="accent1"/>
-          </a:effectRef>
-          <a:fontRef idx="minor">
-            <a:schemeClr val="tx1"/>
-          </a:fontRef>
-        </p:style>
-      </p:cxnSp>
-      <p:sp>
-        <p:nvSpPr>
-          <p:cNvPr id="16" name="Rounded Rectangle 15"/>
-          <p:cNvSpPr/>
-          <p:nvPr/>
-        </p:nvSpPr>
-        <p:spPr>
-          <a:xfrm>
-            <a:off x="726949" y="3321820"/>
-            <a:ext cx="118872" cy="118872"/>
-          </a:xfrm>
-          <a:prstGeom prst="roundRect">
-            <a:avLst>
-              <a:gd name="adj" fmla="val 50000"/>
-            </a:avLst>
-          </a:prstGeom>
           <a:solidFill>
-            <a:srgbClr val="003669"/>
+            <a:srgbClr val="DDE7F3"/>
           </a:solidFill>
           <a:ln>
             <a:noFill/>
@@ -8173,14 +8096,14 @@
       </p:sp>
       <p:sp>
         <p:nvSpPr>
-          <p:cNvPr id="17" name="TextBox 16"/>
+          <p:cNvPr id="15" name="TextBox 14"/>
           <p:cNvSpPr txBox="1"/>
           <p:nvPr/>
         </p:nvSpPr>
         <p:spPr>
           <a:xfrm>
-            <a:off x="512065" y="3280672"/>
-            <a:ext cx="237744" cy="201168"/>
+            <a:off x="585217" y="3493524"/>
+            <a:ext cx="1962910" cy="329184"/>
           </a:xfrm>
           <a:prstGeom prst="rect">
             <a:avLst/>
@@ -8193,35 +8116,35 @@
           </a:bodyPr>
           <a:lstStyle/>
           <a:p>
-            <a:pPr algn="r">
+            <a:pPr algn="ctr">
               <a:lnSpc>
                 <a:spcPct val="128000"/>
               </a:lnSpc>
             </a:pPr>
             <a:r>
-              <a:rPr sz="900" b="1" i="0">
-                <a:solidFill>
-                  <a:srgbClr val="8A5D06"/>
+              <a:rPr sz="1050" b="1" i="0">
+                <a:solidFill>
+                  <a:srgbClr val="16283F"/>
                 </a:solidFill>
                 <a:latin typeface="Arial"/>
                 <a:ea typeface="微软雅黑"/>
                 <a:cs typeface="Arial"/>
               </a:rPr>
-              <a:t>2 月</a:t>
-            </a:r>
-          </a:p>
-        </p:txBody>
-      </p:sp>
-      <p:sp>
-        <p:nvSpPr>
-          <p:cNvPr id="18" name="TextBox 17"/>
+              <a:t>2 月 - 系统功能开发</a:t>
+            </a:r>
+          </a:p>
+        </p:txBody>
+      </p:sp>
+      <p:sp>
+        <p:nvSpPr>
+          <p:cNvPr id="16" name="TextBox 15"/>
           <p:cNvSpPr txBox="1"/>
           <p:nvPr/>
         </p:nvSpPr>
         <p:spPr>
           <a:xfrm>
-            <a:off x="932690" y="3276100"/>
-            <a:ext cx="1060706" cy="201168"/>
+            <a:off x="566929" y="3895861"/>
+            <a:ext cx="2036062" cy="859538"/>
           </a:xfrm>
           <a:prstGeom prst="rect">
             <a:avLst/>
@@ -8229,59 +8152,36 @@
           <a:noFill/>
         </p:spPr>
         <p:txBody>
-          <a:bodyPr wrap="square" lIns="0" rIns="0" tIns="0" bIns="0" anchor="ctr">
+          <a:bodyPr wrap="square" lIns="0" rIns="0" tIns="0" bIns="0" anchor="t">
             <a:spAutoFit/>
           </a:bodyPr>
           <a:lstStyle/>
           <a:p>
             <a:pPr algn="l">
               <a:lnSpc>
-                <a:spcPct val="128000"/>
+                <a:spcPct val="130000"/>
               </a:lnSpc>
             </a:pPr>
             <a:r>
-              <a:rPr sz="1000" b="1" i="0">
-                <a:solidFill>
-                  <a:srgbClr val="003669"/>
+              <a:rPr sz="1000" b="0" i="0">
+                <a:solidFill>
+                  <a:srgbClr val="4E6584"/>
                 </a:solidFill>
                 <a:latin typeface="Arial"/>
                 <a:ea typeface="微软雅黑"/>
                 <a:cs typeface="Arial"/>
               </a:rPr>
-              <a:t>系统功能开发</a:t>
-            </a:r>
-          </a:p>
-        </p:txBody>
-      </p:sp>
-      <p:sp>
-        <p:nvSpPr>
-          <p:cNvPr id="19" name="TextBox 18"/>
-          <p:cNvSpPr txBox="1"/>
-          <p:nvPr/>
-        </p:nvSpPr>
-        <p:spPr>
-          <a:xfrm>
-            <a:off x="2029973" y="3253240"/>
-            <a:ext cx="3919722" cy="256032"/>
-          </a:xfrm>
-          <a:prstGeom prst="rect">
-            <a:avLst/>
-          </a:prstGeom>
-          <a:noFill/>
-        </p:spPr>
-        <p:txBody>
-          <a:bodyPr wrap="square" lIns="0" rIns="0" tIns="0" bIns="0" anchor="ctr">
-            <a:spAutoFit/>
-          </a:bodyPr>
-          <a:lstStyle/>
+              <a:t>1、EIMS 系统功能开发；</a:t>
+            </a:r>
+          </a:p>
           <a:p>
             <a:pPr algn="l">
               <a:lnSpc>
-                <a:spcPct val="128000"/>
+                <a:spcPct val="130000"/>
               </a:lnSpc>
             </a:pPr>
             <a:r>
-              <a:rPr sz="850" b="0" i="0">
+              <a:rPr sz="1000" b="0" i="0">
                 <a:solidFill>
                   <a:srgbClr val="4E6584"/>
                 </a:solidFill>
@@ -8289,29 +8189,27 @@
                 <a:ea typeface="微软雅黑"/>
                 <a:cs typeface="Arial"/>
               </a:rPr>
-              <a:t>1、EIMS 系统功能开发；2、完成变更控制文件与 URS 签批；</a:t>
-            </a:r>
-          </a:p>
-        </p:txBody>
-      </p:sp>
-      <p:sp>
-        <p:nvSpPr>
-          <p:cNvPr id="20" name="Rounded Rectangle 19"/>
+              <a:t>2、完成变更控制文件与 URS 签批；</a:t>
+            </a:r>
+          </a:p>
+        </p:txBody>
+      </p:sp>
+      <p:sp>
+        <p:nvSpPr>
+          <p:cNvPr id="17" name="Chevron 16"/>
           <p:cNvSpPr/>
           <p:nvPr/>
         </p:nvSpPr>
         <p:spPr>
           <a:xfrm>
-            <a:off x="726949" y="3628145"/>
-            <a:ext cx="118872" cy="118872"/>
-          </a:xfrm>
-          <a:prstGeom prst="roundRect">
-            <a:avLst>
-              <a:gd name="adj" fmla="val 50000"/>
-            </a:avLst>
+            <a:off x="2767584" y="3493524"/>
+            <a:ext cx="2145791" cy="329184"/>
+          </a:xfrm>
+          <a:prstGeom prst="chevron">
+            <a:avLst/>
           </a:prstGeom>
           <a:solidFill>
-            <a:srgbClr val="003669"/>
+            <a:srgbClr val="DDE7F3"/>
           </a:solidFill>
           <a:ln>
             <a:noFill/>
@@ -8342,14 +8240,14 @@
       </p:sp>
       <p:sp>
         <p:nvSpPr>
-          <p:cNvPr id="21" name="TextBox 20"/>
+          <p:cNvPr id="18" name="TextBox 17"/>
           <p:cNvSpPr txBox="1"/>
           <p:nvPr/>
         </p:nvSpPr>
         <p:spPr>
           <a:xfrm>
-            <a:off x="512065" y="3586996"/>
-            <a:ext cx="237744" cy="201168"/>
+            <a:off x="2840737" y="3493524"/>
+            <a:ext cx="1962910" cy="329184"/>
           </a:xfrm>
           <a:prstGeom prst="rect">
             <a:avLst/>
@@ -8362,35 +8260,35 @@
           </a:bodyPr>
           <a:lstStyle/>
           <a:p>
-            <a:pPr algn="r">
+            <a:pPr algn="ctr">
               <a:lnSpc>
                 <a:spcPct val="128000"/>
               </a:lnSpc>
             </a:pPr>
             <a:r>
-              <a:rPr sz="900" b="1" i="0">
-                <a:solidFill>
-                  <a:srgbClr val="8A5D06"/>
+              <a:rPr sz="1050" b="1" i="0">
+                <a:solidFill>
+                  <a:srgbClr val="16283F"/>
                 </a:solidFill>
                 <a:latin typeface="Arial"/>
                 <a:ea typeface="微软雅黑"/>
                 <a:cs typeface="Arial"/>
               </a:rPr>
-              <a:t>3 月</a:t>
-            </a:r>
-          </a:p>
-        </p:txBody>
-      </p:sp>
-      <p:sp>
-        <p:nvSpPr>
-          <p:cNvPr id="22" name="TextBox 21"/>
+              <a:t>3 月 - UAT 用户测试</a:t>
+            </a:r>
+          </a:p>
+        </p:txBody>
+      </p:sp>
+      <p:sp>
+        <p:nvSpPr>
+          <p:cNvPr id="19" name="TextBox 18"/>
           <p:cNvSpPr txBox="1"/>
           <p:nvPr/>
         </p:nvSpPr>
         <p:spPr>
           <a:xfrm>
-            <a:off x="932690" y="3582424"/>
-            <a:ext cx="1060706" cy="201168"/>
+            <a:off x="2822448" y="3895861"/>
+            <a:ext cx="2036062" cy="859538"/>
           </a:xfrm>
           <a:prstGeom prst="rect">
             <a:avLst/>
@@ -8398,59 +8296,36 @@
           <a:noFill/>
         </p:spPr>
         <p:txBody>
-          <a:bodyPr wrap="square" lIns="0" rIns="0" tIns="0" bIns="0" anchor="ctr">
+          <a:bodyPr wrap="square" lIns="0" rIns="0" tIns="0" bIns="0" anchor="t">
             <a:spAutoFit/>
           </a:bodyPr>
           <a:lstStyle/>
           <a:p>
             <a:pPr algn="l">
               <a:lnSpc>
-                <a:spcPct val="128000"/>
+                <a:spcPct val="130000"/>
               </a:lnSpc>
             </a:pPr>
             <a:r>
-              <a:rPr sz="1000" b="1" i="0">
-                <a:solidFill>
-                  <a:srgbClr val="003669"/>
+              <a:rPr sz="1000" b="0" i="0">
+                <a:solidFill>
+                  <a:srgbClr val="4E6584"/>
                 </a:solidFill>
                 <a:latin typeface="Arial"/>
                 <a:ea typeface="微软雅黑"/>
                 <a:cs typeface="Arial"/>
               </a:rPr>
-              <a:t>UAT 用户测试</a:t>
-            </a:r>
-          </a:p>
-        </p:txBody>
-      </p:sp>
-      <p:sp>
-        <p:nvSpPr>
-          <p:cNvPr id="23" name="TextBox 22"/>
-          <p:cNvSpPr txBox="1"/>
-          <p:nvPr/>
-        </p:nvSpPr>
-        <p:spPr>
-          <a:xfrm>
-            <a:off x="2029973" y="3559564"/>
-            <a:ext cx="3919722" cy="256032"/>
-          </a:xfrm>
-          <a:prstGeom prst="rect">
-            <a:avLst/>
-          </a:prstGeom>
-          <a:noFill/>
-        </p:spPr>
-        <p:txBody>
-          <a:bodyPr wrap="square" lIns="0" rIns="0" tIns="0" bIns="0" anchor="ctr">
-            <a:spAutoFit/>
-          </a:bodyPr>
-          <a:lstStyle/>
+              <a:t>1、EIMS 系统环境测试；</a:t>
+            </a:r>
+          </a:p>
           <a:p>
             <a:pPr algn="l">
               <a:lnSpc>
-                <a:spcPct val="128000"/>
+                <a:spcPct val="130000"/>
               </a:lnSpc>
             </a:pPr>
             <a:r>
-              <a:rPr sz="850" b="0" i="0">
+              <a:rPr sz="1000" b="0" i="0">
                 <a:solidFill>
                   <a:srgbClr val="4E6584"/>
                 </a:solidFill>
@@ -8458,29 +8333,27 @@
                 <a:ea typeface="微软雅黑"/>
                 <a:cs typeface="Arial"/>
               </a:rPr>
-              <a:t>1、EIMS 系统环境测试；2、UAT 及 VP、RAR、FS 签批，UAT 用户测试；</a:t>
-            </a:r>
-          </a:p>
-        </p:txBody>
-      </p:sp>
-      <p:sp>
-        <p:nvSpPr>
-          <p:cNvPr id="24" name="Rounded Rectangle 23"/>
+              <a:t>2、UAT 及 VP、RAR、FS 签批，UAT 用户测试；</a:t>
+            </a:r>
+          </a:p>
+        </p:txBody>
+      </p:sp>
+      <p:sp>
+        <p:nvSpPr>
+          <p:cNvPr id="20" name="Chevron 19"/>
           <p:cNvSpPr/>
           <p:nvPr/>
         </p:nvSpPr>
         <p:spPr>
           <a:xfrm>
-            <a:off x="726949" y="3934469"/>
-            <a:ext cx="118872" cy="118872"/>
-          </a:xfrm>
-          <a:prstGeom prst="roundRect">
-            <a:avLst>
-              <a:gd name="adj" fmla="val 50000"/>
-            </a:avLst>
+            <a:off x="5023104" y="3493524"/>
+            <a:ext cx="2145791" cy="329184"/>
+          </a:xfrm>
+          <a:prstGeom prst="chevron">
+            <a:avLst/>
           </a:prstGeom>
           <a:solidFill>
-            <a:srgbClr val="003669"/>
+            <a:srgbClr val="DDE7F3"/>
           </a:solidFill>
           <a:ln>
             <a:noFill/>
@@ -8511,14 +8384,14 @@
       </p:sp>
       <p:sp>
         <p:nvSpPr>
-          <p:cNvPr id="25" name="TextBox 24"/>
+          <p:cNvPr id="21" name="TextBox 20"/>
           <p:cNvSpPr txBox="1"/>
           <p:nvPr/>
         </p:nvSpPr>
         <p:spPr>
           <a:xfrm>
-            <a:off x="512065" y="3893321"/>
-            <a:ext cx="237744" cy="201168"/>
+            <a:off x="5096256" y="3493524"/>
+            <a:ext cx="1962910" cy="329184"/>
           </a:xfrm>
           <a:prstGeom prst="rect">
             <a:avLst/>
@@ -8531,35 +8404,35 @@
           </a:bodyPr>
           <a:lstStyle/>
           <a:p>
-            <a:pPr algn="r">
+            <a:pPr algn="ctr">
               <a:lnSpc>
                 <a:spcPct val="128000"/>
               </a:lnSpc>
             </a:pPr>
             <a:r>
-              <a:rPr sz="900" b="1" i="0">
-                <a:solidFill>
-                  <a:srgbClr val="8A5D06"/>
+              <a:rPr sz="1050" b="1" i="0">
+                <a:solidFill>
+                  <a:srgbClr val="16283F"/>
                 </a:solidFill>
                 <a:latin typeface="Arial"/>
                 <a:ea typeface="微软雅黑"/>
                 <a:cs typeface="Arial"/>
               </a:rPr>
-              <a:t>4 月</a:t>
-            </a:r>
-          </a:p>
-        </p:txBody>
-      </p:sp>
-      <p:sp>
-        <p:nvSpPr>
-          <p:cNvPr id="26" name="TextBox 25"/>
+              <a:t>4 月 - 文件撰写审批</a:t>
+            </a:r>
+          </a:p>
+        </p:txBody>
+      </p:sp>
+      <p:sp>
+        <p:nvSpPr>
+          <p:cNvPr id="22" name="TextBox 21"/>
           <p:cNvSpPr txBox="1"/>
           <p:nvPr/>
         </p:nvSpPr>
         <p:spPr>
           <a:xfrm>
-            <a:off x="932690" y="3888749"/>
-            <a:ext cx="1060706" cy="201168"/>
+            <a:off x="5077968" y="3895861"/>
+            <a:ext cx="2036062" cy="859538"/>
           </a:xfrm>
           <a:prstGeom prst="rect">
             <a:avLst/>
@@ -8567,59 +8440,18 @@
           <a:noFill/>
         </p:spPr>
         <p:txBody>
-          <a:bodyPr wrap="square" lIns="0" rIns="0" tIns="0" bIns="0" anchor="ctr">
+          <a:bodyPr wrap="square" lIns="0" rIns="0" tIns="0" bIns="0" anchor="t">
             <a:spAutoFit/>
           </a:bodyPr>
           <a:lstStyle/>
           <a:p>
             <a:pPr algn="l">
               <a:lnSpc>
-                <a:spcPct val="128000"/>
+                <a:spcPct val="130000"/>
               </a:lnSpc>
             </a:pPr>
             <a:r>
-              <a:rPr sz="1000" b="1" i="0">
-                <a:solidFill>
-                  <a:srgbClr val="003669"/>
-                </a:solidFill>
-                <a:latin typeface="Arial"/>
-                <a:ea typeface="微软雅黑"/>
-                <a:cs typeface="Arial"/>
-              </a:rPr>
-              <a:t>文件撰写审批</a:t>
-            </a:r>
-          </a:p>
-        </p:txBody>
-      </p:sp>
-      <p:sp>
-        <p:nvSpPr>
-          <p:cNvPr id="27" name="TextBox 26"/>
-          <p:cNvSpPr txBox="1"/>
-          <p:nvPr/>
-        </p:nvSpPr>
-        <p:spPr>
-          <a:xfrm>
-            <a:off x="2029973" y="3865889"/>
-            <a:ext cx="3919722" cy="256032"/>
-          </a:xfrm>
-          <a:prstGeom prst="rect">
-            <a:avLst/>
-          </a:prstGeom>
-          <a:noFill/>
-        </p:spPr>
-        <p:txBody>
-          <a:bodyPr wrap="square" lIns="0" rIns="0" tIns="0" bIns="0" anchor="ctr">
-            <a:spAutoFit/>
-          </a:bodyPr>
-          <a:lstStyle/>
-          <a:p>
-            <a:pPr algn="l">
-              <a:lnSpc>
-                <a:spcPct val="128000"/>
-              </a:lnSpc>
-            </a:pPr>
-            <a:r>
-              <a:rPr sz="850" b="0" i="0">
+              <a:rPr sz="1000" b="0" i="0">
                 <a:solidFill>
                   <a:srgbClr val="4E6584"/>
                 </a:solidFill>
@@ -8634,22 +8466,20 @@
       </p:sp>
       <p:sp>
         <p:nvSpPr>
-          <p:cNvPr id="28" name="Rounded Rectangle 27"/>
+          <p:cNvPr id="23" name="Chevron 22"/>
           <p:cNvSpPr/>
           <p:nvPr/>
         </p:nvSpPr>
         <p:spPr>
           <a:xfrm>
-            <a:off x="726949" y="4240794"/>
-            <a:ext cx="118872" cy="118872"/>
-          </a:xfrm>
-          <a:prstGeom prst="roundRect">
-            <a:avLst>
-              <a:gd name="adj" fmla="val 50000"/>
-            </a:avLst>
+            <a:off x="7278623" y="3493524"/>
+            <a:ext cx="2145791" cy="329184"/>
+          </a:xfrm>
+          <a:prstGeom prst="chevron">
+            <a:avLst/>
           </a:prstGeom>
           <a:solidFill>
-            <a:srgbClr val="003669"/>
+            <a:srgbClr val="DDE7F3"/>
           </a:solidFill>
           <a:ln>
             <a:noFill/>
@@ -8680,14 +8510,14 @@
       </p:sp>
       <p:sp>
         <p:nvSpPr>
-          <p:cNvPr id="29" name="TextBox 28"/>
+          <p:cNvPr id="24" name="TextBox 23"/>
           <p:cNvSpPr txBox="1"/>
           <p:nvPr/>
         </p:nvSpPr>
         <p:spPr>
           <a:xfrm>
-            <a:off x="512065" y="4199646"/>
-            <a:ext cx="237744" cy="201168"/>
+            <a:off x="7351776" y="3493524"/>
+            <a:ext cx="1962910" cy="329184"/>
           </a:xfrm>
           <a:prstGeom prst="rect">
             <a:avLst/>
@@ -8700,35 +8530,35 @@
           </a:bodyPr>
           <a:lstStyle/>
           <a:p>
-            <a:pPr algn="r">
+            <a:pPr algn="ctr">
               <a:lnSpc>
                 <a:spcPct val="128000"/>
               </a:lnSpc>
             </a:pPr>
             <a:r>
-              <a:rPr sz="900" b="1" i="0">
-                <a:solidFill>
-                  <a:srgbClr val="8A5D06"/>
+              <a:rPr sz="1050" b="1" i="0">
+                <a:solidFill>
+                  <a:srgbClr val="16283F"/>
                 </a:solidFill>
                 <a:latin typeface="Arial"/>
                 <a:ea typeface="微软雅黑"/>
                 <a:cs typeface="Arial"/>
               </a:rPr>
-              <a:t>5 月</a:t>
-            </a:r>
-          </a:p>
-        </p:txBody>
-      </p:sp>
-      <p:sp>
-        <p:nvSpPr>
-          <p:cNvPr id="30" name="TextBox 29"/>
+              <a:t>5 月 - 系统验证执行</a:t>
+            </a:r>
+          </a:p>
+        </p:txBody>
+      </p:sp>
+      <p:sp>
+        <p:nvSpPr>
+          <p:cNvPr id="25" name="TextBox 24"/>
           <p:cNvSpPr txBox="1"/>
           <p:nvPr/>
         </p:nvSpPr>
         <p:spPr>
           <a:xfrm>
-            <a:off x="932690" y="4195074"/>
-            <a:ext cx="1060706" cy="201168"/>
+            <a:off x="7333488" y="3895861"/>
+            <a:ext cx="2036062" cy="859538"/>
           </a:xfrm>
           <a:prstGeom prst="rect">
             <a:avLst/>
@@ -8736,59 +8566,18 @@
           <a:noFill/>
         </p:spPr>
         <p:txBody>
-          <a:bodyPr wrap="square" lIns="0" rIns="0" tIns="0" bIns="0" anchor="ctr">
+          <a:bodyPr wrap="square" lIns="0" rIns="0" tIns="0" bIns="0" anchor="t">
             <a:spAutoFit/>
           </a:bodyPr>
           <a:lstStyle/>
           <a:p>
             <a:pPr algn="l">
               <a:lnSpc>
-                <a:spcPct val="128000"/>
+                <a:spcPct val="130000"/>
               </a:lnSpc>
             </a:pPr>
             <a:r>
-              <a:rPr sz="1000" b="1" i="0">
-                <a:solidFill>
-                  <a:srgbClr val="003669"/>
-                </a:solidFill>
-                <a:latin typeface="Arial"/>
-                <a:ea typeface="微软雅黑"/>
-                <a:cs typeface="Arial"/>
-              </a:rPr>
-              <a:t>系统验证执行</a:t>
-            </a:r>
-          </a:p>
-        </p:txBody>
-      </p:sp>
-      <p:sp>
-        <p:nvSpPr>
-          <p:cNvPr id="31" name="TextBox 30"/>
-          <p:cNvSpPr txBox="1"/>
-          <p:nvPr/>
-        </p:nvSpPr>
-        <p:spPr>
-          <a:xfrm>
-            <a:off x="2029973" y="4172214"/>
-            <a:ext cx="3919722" cy="256032"/>
-          </a:xfrm>
-          <a:prstGeom prst="rect">
-            <a:avLst/>
-          </a:prstGeom>
-          <a:noFill/>
-        </p:spPr>
-        <p:txBody>
-          <a:bodyPr wrap="square" lIns="0" rIns="0" tIns="0" bIns="0" anchor="ctr">
-            <a:spAutoFit/>
-          </a:bodyPr>
-          <a:lstStyle/>
-          <a:p>
-            <a:pPr algn="l">
-              <a:lnSpc>
-                <a:spcPct val="128000"/>
-              </a:lnSpc>
-            </a:pPr>
-            <a:r>
-              <a:rPr sz="850" b="0" i="0">
+              <a:rPr sz="1000" b="0" i="0">
                 <a:solidFill>
                   <a:srgbClr val="4E6584"/>
                 </a:solidFill>
@@ -8803,22 +8592,20 @@
       </p:sp>
       <p:sp>
         <p:nvSpPr>
-          <p:cNvPr id="32" name="Rounded Rectangle 31"/>
+          <p:cNvPr id="26" name="Chevron 25"/>
           <p:cNvSpPr/>
           <p:nvPr/>
         </p:nvSpPr>
         <p:spPr>
           <a:xfrm>
-            <a:off x="726949" y="4547119"/>
-            <a:ext cx="118872" cy="118872"/>
-          </a:xfrm>
-          <a:prstGeom prst="roundRect">
-            <a:avLst>
-              <a:gd name="adj" fmla="val 50000"/>
-            </a:avLst>
+            <a:off x="9534143" y="3493524"/>
+            <a:ext cx="2145791" cy="329184"/>
+          </a:xfrm>
+          <a:prstGeom prst="chevron">
+            <a:avLst/>
           </a:prstGeom>
           <a:solidFill>
-            <a:srgbClr val="003669"/>
+            <a:srgbClr val="DDE7F3"/>
           </a:solidFill>
           <a:ln>
             <a:noFill/>
@@ -8849,14 +8636,14 @@
       </p:sp>
       <p:sp>
         <p:nvSpPr>
-          <p:cNvPr id="33" name="TextBox 32"/>
+          <p:cNvPr id="27" name="TextBox 26"/>
           <p:cNvSpPr txBox="1"/>
           <p:nvPr/>
         </p:nvSpPr>
         <p:spPr>
           <a:xfrm>
-            <a:off x="512065" y="4505971"/>
-            <a:ext cx="237744" cy="201168"/>
+            <a:off x="9607295" y="3493524"/>
+            <a:ext cx="1962910" cy="329184"/>
           </a:xfrm>
           <a:prstGeom prst="rect">
             <a:avLst/>
@@ -8869,35 +8656,35 @@
           </a:bodyPr>
           <a:lstStyle/>
           <a:p>
-            <a:pPr algn="r">
+            <a:pPr algn="ctr">
               <a:lnSpc>
                 <a:spcPct val="128000"/>
               </a:lnSpc>
             </a:pPr>
             <a:r>
-              <a:rPr sz="900" b="1" i="0">
-                <a:solidFill>
-                  <a:srgbClr val="8A5D06"/>
+              <a:rPr sz="1050" b="1" i="0">
+                <a:solidFill>
+                  <a:srgbClr val="16283F"/>
                 </a:solidFill>
                 <a:latin typeface="Arial"/>
                 <a:ea typeface="微软雅黑"/>
                 <a:cs typeface="Arial"/>
               </a:rPr>
-              <a:t>6 月</a:t>
-            </a:r>
-          </a:p>
-        </p:txBody>
-      </p:sp>
-      <p:sp>
-        <p:nvSpPr>
-          <p:cNvPr id="34" name="TextBox 33"/>
+              <a:t>6 月 - 系统放行与培训</a:t>
+            </a:r>
+          </a:p>
+        </p:txBody>
+      </p:sp>
+      <p:sp>
+        <p:nvSpPr>
+          <p:cNvPr id="28" name="TextBox 27"/>
           <p:cNvSpPr txBox="1"/>
           <p:nvPr/>
         </p:nvSpPr>
         <p:spPr>
           <a:xfrm>
-            <a:off x="932690" y="4501399"/>
-            <a:ext cx="1060706" cy="201168"/>
+            <a:off x="9589007" y="3895861"/>
+            <a:ext cx="2036062" cy="859538"/>
           </a:xfrm>
           <a:prstGeom prst="rect">
             <a:avLst/>
@@ -8905,59 +8692,36 @@
           <a:noFill/>
         </p:spPr>
         <p:txBody>
-          <a:bodyPr wrap="square" lIns="0" rIns="0" tIns="0" bIns="0" anchor="ctr">
+          <a:bodyPr wrap="square" lIns="0" rIns="0" tIns="0" bIns="0" anchor="t">
             <a:spAutoFit/>
           </a:bodyPr>
           <a:lstStyle/>
           <a:p>
             <a:pPr algn="l">
               <a:lnSpc>
-                <a:spcPct val="128000"/>
+                <a:spcPct val="130000"/>
               </a:lnSpc>
             </a:pPr>
             <a:r>
-              <a:rPr sz="1000" b="1" i="0">
-                <a:solidFill>
-                  <a:srgbClr val="003669"/>
+              <a:rPr sz="1000" b="0" i="0">
+                <a:solidFill>
+                  <a:srgbClr val="4E6584"/>
                 </a:solidFill>
                 <a:latin typeface="Arial"/>
                 <a:ea typeface="微软雅黑"/>
                 <a:cs typeface="Arial"/>
               </a:rPr>
-              <a:t>系统放行与培训</a:t>
-            </a:r>
-          </a:p>
-        </p:txBody>
-      </p:sp>
-      <p:sp>
-        <p:nvSpPr>
-          <p:cNvPr id="35" name="TextBox 34"/>
-          <p:cNvSpPr txBox="1"/>
-          <p:nvPr/>
-        </p:nvSpPr>
-        <p:spPr>
-          <a:xfrm>
-            <a:off x="2029973" y="4478539"/>
-            <a:ext cx="3919722" cy="256032"/>
-          </a:xfrm>
-          <a:prstGeom prst="rect">
-            <a:avLst/>
-          </a:prstGeom>
-          <a:noFill/>
-        </p:spPr>
-        <p:txBody>
-          <a:bodyPr wrap="square" lIns="0" rIns="0" tIns="0" bIns="0" anchor="ctr">
-            <a:spAutoFit/>
-          </a:bodyPr>
-          <a:lstStyle/>
+              <a:t>1、EIMS 系统 SOP 生效培训；</a:t>
+            </a:r>
+          </a:p>
           <a:p>
             <a:pPr algn="l">
               <a:lnSpc>
-                <a:spcPct val="128000"/>
+                <a:spcPct val="130000"/>
               </a:lnSpc>
             </a:pPr>
             <a:r>
-              <a:rPr sz="850" b="0" i="0">
+              <a:rPr sz="1000" b="0" i="0">
                 <a:solidFill>
                   <a:srgbClr val="4E6584"/>
                 </a:solidFill>
@@ -8965,21 +8729,21 @@
                 <a:ea typeface="微软雅黑"/>
                 <a:cs typeface="Arial"/>
               </a:rPr>
-              <a:t>1、EIMS 系统 SOP 生效培训；2、EIMS 系统验证后放行；</a:t>
-            </a:r>
-          </a:p>
-        </p:txBody>
-      </p:sp>
-      <p:sp>
-        <p:nvSpPr>
-          <p:cNvPr id="36" name="Rectangle 35"/>
+              <a:t>2、EIMS 系统验证后放行；</a:t>
+            </a:r>
+          </a:p>
+        </p:txBody>
+      </p:sp>
+      <p:sp>
+        <p:nvSpPr>
+          <p:cNvPr id="29" name="Rectangle 28"/>
           <p:cNvSpPr/>
           <p:nvPr/>
         </p:nvSpPr>
         <p:spPr>
           <a:xfrm>
-            <a:off x="512065" y="4903736"/>
-            <a:ext cx="50292" cy="182880"/>
+            <a:off x="512065" y="4901704"/>
+            <a:ext cx="50292" cy="201168"/>
           </a:xfrm>
           <a:prstGeom prst="rect">
             <a:avLst/>
@@ -9016,14 +8780,14 @@
       </p:sp>
       <p:sp>
         <p:nvSpPr>
-          <p:cNvPr id="37" name="TextBox 36"/>
+          <p:cNvPr id="30" name="TextBox 29"/>
           <p:cNvSpPr txBox="1"/>
           <p:nvPr/>
         </p:nvSpPr>
         <p:spPr>
           <a:xfrm>
-            <a:off x="658369" y="4885448"/>
-            <a:ext cx="5291325" cy="219456"/>
+            <a:off x="658369" y="4883416"/>
+            <a:ext cx="11021565" cy="237744"/>
           </a:xfrm>
           <a:prstGeom prst="rect">
             <a:avLst/>
@@ -9042,7 +8806,7 @@
               </a:lnSpc>
             </a:pPr>
             <a:r>
-              <a:rPr sz="1300" b="1" i="0">
+              <a:rPr sz="1400" b="1" i="0">
                 <a:solidFill>
                   <a:srgbClr val="003669"/>
                 </a:solidFill>
@@ -9057,14 +8821,14 @@
       </p:sp>
       <p:sp>
         <p:nvSpPr>
-          <p:cNvPr id="38" name="Rounded Rectangle 37"/>
+          <p:cNvPr id="31" name="Rounded Rectangle 30"/>
           <p:cNvSpPr/>
           <p:nvPr/>
         </p:nvSpPr>
         <p:spPr>
           <a:xfrm>
-            <a:off x="512065" y="5123192"/>
-            <a:ext cx="5437630" cy="307002"/>
+            <a:off x="512065" y="5176024"/>
+            <a:ext cx="3625086" cy="1005334"/>
           </a:xfrm>
           <a:prstGeom prst="roundRect">
             <a:avLst>
@@ -9103,14 +8867,14 @@
       </p:sp>
       <p:sp>
         <p:nvSpPr>
-          <p:cNvPr id="39" name="TextBox 38"/>
+          <p:cNvPr id="32" name="TextBox 31"/>
           <p:cNvSpPr txBox="1"/>
           <p:nvPr/>
         </p:nvSpPr>
         <p:spPr>
           <a:xfrm>
-            <a:off x="640081" y="5123192"/>
-            <a:ext cx="1417323" cy="307002"/>
+            <a:off x="658369" y="5285753"/>
+            <a:ext cx="3332478" cy="384048"/>
           </a:xfrm>
           <a:prstGeom prst="rect">
             <a:avLst/>
@@ -9118,18 +8882,18 @@
           <a:noFill/>
         </p:spPr>
         <p:txBody>
-          <a:bodyPr wrap="square" lIns="0" rIns="0" tIns="0" bIns="0" anchor="ctr">
+          <a:bodyPr wrap="square" lIns="0" rIns="0" tIns="0" bIns="0" anchor="t">
             <a:spAutoFit/>
           </a:bodyPr>
           <a:lstStyle/>
           <a:p>
             <a:pPr algn="l">
               <a:lnSpc>
-                <a:spcPct val="128000"/>
+                <a:spcPct val="120000"/>
               </a:lnSpc>
             </a:pPr>
             <a:r>
-              <a:rPr sz="950" b="1" i="0">
+              <a:rPr sz="1250" b="1" i="0">
                 <a:solidFill>
                   <a:srgbClr val="003669"/>
                 </a:solidFill>
@@ -9144,14 +8908,14 @@
       </p:sp>
       <p:sp>
         <p:nvSpPr>
-          <p:cNvPr id="40" name="TextBox 39"/>
+          <p:cNvPr id="33" name="TextBox 32"/>
           <p:cNvSpPr txBox="1"/>
           <p:nvPr/>
         </p:nvSpPr>
         <p:spPr>
           <a:xfrm>
-            <a:off x="2057405" y="5123192"/>
-            <a:ext cx="3764274" cy="307002"/>
+            <a:off x="658369" y="5706378"/>
+            <a:ext cx="3332478" cy="365252"/>
           </a:xfrm>
           <a:prstGeom prst="rect">
             <a:avLst/>
@@ -9159,20 +8923,20 @@
           <a:noFill/>
         </p:spPr>
         <p:txBody>
-          <a:bodyPr wrap="square" lIns="0" rIns="0" tIns="0" bIns="0" anchor="ctr">
+          <a:bodyPr wrap="square" lIns="0" rIns="0" tIns="0" bIns="0" anchor="t">
             <a:spAutoFit/>
           </a:bodyPr>
           <a:lstStyle/>
           <a:p>
             <a:pPr algn="l">
               <a:lnSpc>
-                <a:spcPct val="124000"/>
+                <a:spcPct val="130000"/>
               </a:lnSpc>
             </a:pPr>
             <a:r>
-              <a:rPr sz="850" b="0" i="0">
-                <a:solidFill>
-                  <a:srgbClr val="4E6584"/>
+              <a:rPr sz="1000" b="0" i="0">
+                <a:solidFill>
+                  <a:srgbClr val="16283F"/>
                 </a:solidFill>
                 <a:latin typeface="Arial"/>
                 <a:ea typeface="微软雅黑"/>
@@ -9185,14 +8949,14 @@
       </p:sp>
       <p:sp>
         <p:nvSpPr>
-          <p:cNvPr id="41" name="Rounded Rectangle 40"/>
+          <p:cNvPr id="34" name="Rounded Rectangle 33"/>
           <p:cNvSpPr/>
           <p:nvPr/>
         </p:nvSpPr>
         <p:spPr>
           <a:xfrm>
-            <a:off x="512065" y="5475915"/>
-            <a:ext cx="5437630" cy="307002"/>
+            <a:off x="4283456" y="5176024"/>
+            <a:ext cx="3625086" cy="1005334"/>
           </a:xfrm>
           <a:prstGeom prst="roundRect">
             <a:avLst>
@@ -9231,14 +8995,14 @@
       </p:sp>
       <p:sp>
         <p:nvSpPr>
-          <p:cNvPr id="42" name="TextBox 41"/>
+          <p:cNvPr id="35" name="TextBox 34"/>
           <p:cNvSpPr txBox="1"/>
           <p:nvPr/>
         </p:nvSpPr>
         <p:spPr>
           <a:xfrm>
-            <a:off x="640081" y="5475915"/>
-            <a:ext cx="1417323" cy="307002"/>
+            <a:off x="4429760" y="5285753"/>
+            <a:ext cx="3332478" cy="384048"/>
           </a:xfrm>
           <a:prstGeom prst="rect">
             <a:avLst/>
@@ -9246,18 +9010,18 @@
           <a:noFill/>
         </p:spPr>
         <p:txBody>
-          <a:bodyPr wrap="square" lIns="0" rIns="0" tIns="0" bIns="0" anchor="ctr">
+          <a:bodyPr wrap="square" lIns="0" rIns="0" tIns="0" bIns="0" anchor="t">
             <a:spAutoFit/>
           </a:bodyPr>
           <a:lstStyle/>
           <a:p>
             <a:pPr algn="l">
               <a:lnSpc>
-                <a:spcPct val="128000"/>
+                <a:spcPct val="120000"/>
               </a:lnSpc>
             </a:pPr>
             <a:r>
-              <a:rPr sz="950" b="1" i="0">
+              <a:rPr sz="1250" b="1" i="0">
                 <a:solidFill>
                   <a:srgbClr val="003669"/>
                 </a:solidFill>
@@ -9272,14 +9036,14 @@
       </p:sp>
       <p:sp>
         <p:nvSpPr>
-          <p:cNvPr id="43" name="TextBox 42"/>
+          <p:cNvPr id="36" name="TextBox 35"/>
           <p:cNvSpPr txBox="1"/>
           <p:nvPr/>
         </p:nvSpPr>
         <p:spPr>
           <a:xfrm>
-            <a:off x="2057405" y="5475915"/>
-            <a:ext cx="3764274" cy="307002"/>
+            <a:off x="4429760" y="5706378"/>
+            <a:ext cx="3332478" cy="365252"/>
           </a:xfrm>
           <a:prstGeom prst="rect">
             <a:avLst/>
@@ -9287,20 +9051,20 @@
           <a:noFill/>
         </p:spPr>
         <p:txBody>
-          <a:bodyPr wrap="square" lIns="0" rIns="0" tIns="0" bIns="0" anchor="ctr">
+          <a:bodyPr wrap="square" lIns="0" rIns="0" tIns="0" bIns="0" anchor="t">
             <a:spAutoFit/>
           </a:bodyPr>
           <a:lstStyle/>
           <a:p>
             <a:pPr algn="l">
               <a:lnSpc>
-                <a:spcPct val="124000"/>
+                <a:spcPct val="130000"/>
               </a:lnSpc>
             </a:pPr>
             <a:r>
-              <a:rPr sz="850" b="0" i="0">
-                <a:solidFill>
-                  <a:srgbClr val="4E6584"/>
+              <a:rPr sz="1100" b="0" i="0">
+                <a:solidFill>
+                  <a:srgbClr val="16283F"/>
                 </a:solidFill>
                 <a:latin typeface="Arial"/>
                 <a:ea typeface="微软雅黑"/>
@@ -9313,14 +9077,14 @@
       </p:sp>
       <p:sp>
         <p:nvSpPr>
-          <p:cNvPr id="44" name="Rounded Rectangle 43"/>
+          <p:cNvPr id="37" name="Rounded Rectangle 36"/>
           <p:cNvSpPr/>
           <p:nvPr/>
         </p:nvSpPr>
         <p:spPr>
           <a:xfrm>
-            <a:off x="512065" y="5828637"/>
-            <a:ext cx="5437630" cy="307002"/>
+            <a:off x="8054847" y="5176024"/>
+            <a:ext cx="3625086" cy="1005334"/>
           </a:xfrm>
           <a:prstGeom prst="roundRect">
             <a:avLst>
@@ -9359,14 +9123,14 @@
       </p:sp>
       <p:sp>
         <p:nvSpPr>
-          <p:cNvPr id="45" name="TextBox 44"/>
+          <p:cNvPr id="38" name="TextBox 37"/>
           <p:cNvSpPr txBox="1"/>
           <p:nvPr/>
         </p:nvSpPr>
         <p:spPr>
           <a:xfrm>
-            <a:off x="640081" y="5828637"/>
-            <a:ext cx="1417323" cy="307002"/>
+            <a:off x="8201152" y="5285753"/>
+            <a:ext cx="3332478" cy="384048"/>
           </a:xfrm>
           <a:prstGeom prst="rect">
             <a:avLst/>
@@ -9374,7 +9138,89 @@
           <a:noFill/>
         </p:spPr>
         <p:txBody>
-          <a:bodyPr wrap="square" lIns="0" rIns="0" tIns="0" bIns="0" anchor="ctr">
+          <a:bodyPr wrap="square" lIns="0" rIns="0" tIns="0" bIns="0" anchor="t">
+            <a:spAutoFit/>
+          </a:bodyPr>
+          <a:lstStyle/>
+          <a:p>
+            <a:pPr algn="l">
+              <a:lnSpc>
+                <a:spcPct val="120000"/>
+              </a:lnSpc>
+            </a:pPr>
+            <a:r>
+              <a:rPr sz="1250" b="1" i="0">
+                <a:solidFill>
+                  <a:srgbClr val="003669"/>
+                </a:solidFill>
+                <a:latin typeface="Arial"/>
+                <a:ea typeface="微软雅黑"/>
+                <a:cs typeface="Arial"/>
+              </a:rPr>
+              <a:t>内控平台数据互通</a:t>
+            </a:r>
+          </a:p>
+        </p:txBody>
+      </p:sp>
+      <p:sp>
+        <p:nvSpPr>
+          <p:cNvPr id="39" name="TextBox 38"/>
+          <p:cNvSpPr txBox="1"/>
+          <p:nvPr/>
+        </p:nvSpPr>
+        <p:spPr>
+          <a:xfrm>
+            <a:off x="8201152" y="5706378"/>
+            <a:ext cx="3332478" cy="365252"/>
+          </a:xfrm>
+          <a:prstGeom prst="rect">
+            <a:avLst/>
+          </a:prstGeom>
+          <a:noFill/>
+        </p:spPr>
+        <p:txBody>
+          <a:bodyPr wrap="square" lIns="0" rIns="0" tIns="0" bIns="0" anchor="t">
+            <a:spAutoFit/>
+          </a:bodyPr>
+          <a:lstStyle/>
+          <a:p>
+            <a:pPr algn="l">
+              <a:lnSpc>
+                <a:spcPct val="130000"/>
+              </a:lnSpc>
+            </a:pPr>
+            <a:r>
+              <a:rPr sz="1100" b="0" i="0">
+                <a:solidFill>
+                  <a:srgbClr val="16283F"/>
+                </a:solidFill>
+                <a:latin typeface="Arial"/>
+                <a:ea typeface="微软雅黑"/>
+                <a:cs typeface="Arial"/>
+              </a:rPr>
+              <a:t>内控平台功能升级、历史数据迁移及验证环境数据共享，实现与 EIMS 的数据互通，预计 8 月份完成。</a:t>
+            </a:r>
+          </a:p>
+        </p:txBody>
+      </p:sp>
+      <p:sp>
+        <p:nvSpPr>
+          <p:cNvPr id="40" name="TextBox 39"/>
+          <p:cNvSpPr txBox="1"/>
+          <p:nvPr/>
+        </p:nvSpPr>
+        <p:spPr>
+          <a:xfrm>
+            <a:off x="512065" y="6309375"/>
+            <a:ext cx="9875544" cy="182880"/>
+          </a:xfrm>
+          <a:prstGeom prst="rect">
+            <a:avLst/>
+          </a:prstGeom>
+          <a:noFill/>
+        </p:spPr>
+        <p:txBody>
+          <a:bodyPr wrap="square" lIns="0" rIns="0" tIns="0" bIns="0" anchor="t">
             <a:spAutoFit/>
           </a:bodyPr>
           <a:lstStyle/>
@@ -9385,29 +9231,29 @@
               </a:lnSpc>
             </a:pPr>
             <a:r>
-              <a:rPr sz="950" b="1" i="0">
-                <a:solidFill>
-                  <a:srgbClr val="003669"/>
+              <a:rPr sz="900" b="0" i="0">
+                <a:solidFill>
+                  <a:srgbClr val="4E6584"/>
                 </a:solidFill>
                 <a:latin typeface="Arial"/>
                 <a:ea typeface="微软雅黑"/>
                 <a:cs typeface="Arial"/>
               </a:rPr>
-              <a:t>内控平台数据互通</a:t>
-            </a:r>
-          </a:p>
-        </p:txBody>
-      </p:sp>
-      <p:sp>
-        <p:nvSpPr>
-          <p:cNvPr id="46" name="TextBox 45"/>
+              <a:t>数据来自设备管理系统汇报材料</a:t>
+            </a:r>
+          </a:p>
+        </p:txBody>
+      </p:sp>
+      <p:sp>
+        <p:nvSpPr>
+          <p:cNvPr id="41" name="TextBox 40"/>
           <p:cNvSpPr txBox="1"/>
           <p:nvPr/>
         </p:nvSpPr>
         <p:spPr>
           <a:xfrm>
-            <a:off x="2057405" y="5828637"/>
-            <a:ext cx="3764274" cy="307002"/>
+            <a:off x="10515626" y="6309375"/>
+            <a:ext cx="731521" cy="182880"/>
           </a:xfrm>
           <a:prstGeom prst="rect">
             <a:avLst/>
@@ -9415,18 +9261,18 @@
           <a:noFill/>
         </p:spPr>
         <p:txBody>
-          <a:bodyPr wrap="square" lIns="0" rIns="0" tIns="0" bIns="0" anchor="ctr">
+          <a:bodyPr wrap="square" lIns="0" rIns="0" tIns="0" bIns="0" anchor="t">
             <a:spAutoFit/>
           </a:bodyPr>
           <a:lstStyle/>
           <a:p>
-            <a:pPr algn="l">
+            <a:pPr algn="r">
               <a:lnSpc>
-                <a:spcPct val="124000"/>
+                <a:spcPct val="128000"/>
               </a:lnSpc>
             </a:pPr>
             <a:r>
-              <a:rPr sz="850" b="0" i="0">
+              <a:rPr sz="900" b="0" i="0">
                 <a:solidFill>
                   <a:srgbClr val="4E6584"/>
                 </a:solidFill>
@@ -9434,21 +9280,80 @@
                 <a:ea typeface="微软雅黑"/>
                 <a:cs typeface="Arial"/>
               </a:rPr>
-              <a:t>内控平台功能升级、历史数据迁移及验证环境数据共享，实现与 EIMS 的数据互通，预计 8 月份完成。</a:t>
-            </a:r>
-          </a:p>
-        </p:txBody>
-      </p:sp>
-      <p:sp>
-        <p:nvSpPr>
-          <p:cNvPr id="47" name="TextBox 46"/>
+              <a:t>1 / 2</a:t>
+            </a:r>
+          </a:p>
+        </p:txBody>
+      </p:sp>
+    </p:spTree>
+  </p:cSld>
+  <p:clrMapOvr>
+    <a:masterClrMapping/>
+  </p:clrMapOvr>
+</p:sld>
+</file>
+
+<file path=ppt/slides/slide2.xml><?xml version="1.0" encoding="utf-8"?>
+<p:sld xmlns:a="http://schemas.openxmlformats.org/drawingml/2006/main" xmlns:p="http://schemas.openxmlformats.org/presentationml/2006/main" xmlns:r="http://schemas.openxmlformats.org/officeDocument/2006/relationships">
+  <p:cSld>
+    <p:spTree>
+      <p:nvGrpSpPr>
+        <p:cNvPr id="1" name=""/>
+        <p:cNvGrpSpPr/>
+        <p:nvPr/>
+      </p:nvGrpSpPr>
+      <p:grpSpPr/>
+      <p:sp>
+        <p:nvSpPr>
+          <p:cNvPr id="2" name="TextBox 1"/>
           <p:cNvSpPr txBox="1"/>
           <p:nvPr/>
         </p:nvSpPr>
         <p:spPr>
           <a:xfrm>
-            <a:off x="6242304" y="1579883"/>
-            <a:ext cx="5437630" cy="237744"/>
+            <a:off x="512065" y="1097282"/>
+            <a:ext cx="11167869" cy="366268"/>
+          </a:xfrm>
+          <a:prstGeom prst="rect">
+            <a:avLst/>
+          </a:prstGeom>
+          <a:noFill/>
+        </p:spPr>
+        <p:txBody>
+          <a:bodyPr wrap="square" lIns="0" rIns="0" tIns="0" bIns="0" anchor="t">
+            <a:spAutoFit/>
+          </a:bodyPr>
+          <a:lstStyle/>
+          <a:p>
+            <a:pPr algn="l">
+              <a:lnSpc>
+                <a:spcPct val="118000"/>
+              </a:lnSpc>
+            </a:pPr>
+            <a:r>
+              <a:rPr sz="2200" b="1" i="0">
+                <a:solidFill>
+                  <a:srgbClr val="16283F"/>
+                </a:solidFill>
+                <a:latin typeface="Arial"/>
+                <a:ea typeface="微软雅黑"/>
+                <a:cs typeface="Arial"/>
+              </a:rPr>
+              <a:t>巡检管理系统：隐患台账已归集 3.5 万余条</a:t>
+            </a:r>
+          </a:p>
+        </p:txBody>
+      </p:sp>
+      <p:sp>
+        <p:nvSpPr>
+          <p:cNvPr id="3" name="TextBox 2"/>
+          <p:cNvSpPr txBox="1"/>
+          <p:nvPr/>
+        </p:nvSpPr>
+        <p:spPr>
+          <a:xfrm>
+            <a:off x="512065" y="1609856"/>
+            <a:ext cx="11167869" cy="201168"/>
           </a:xfrm>
           <a:prstGeom prst="rect">
             <a:avLst/>
@@ -9467,48 +9372,7 @@
               </a:lnSpc>
             </a:pPr>
             <a:r>
-              <a:rPr sz="1500" b="1" i="0">
-                <a:solidFill>
-                  <a:srgbClr val="003669"/>
-                </a:solidFill>
-                <a:latin typeface="Arial"/>
-                <a:ea typeface="微软雅黑"/>
-                <a:cs typeface="Arial"/>
-              </a:rPr>
-              <a:t>巡检管理系统</a:t>
-            </a:r>
-          </a:p>
-        </p:txBody>
-      </p:sp>
-      <p:sp>
-        <p:nvSpPr>
-          <p:cNvPr id="48" name="TextBox 47"/>
-          <p:cNvSpPr txBox="1"/>
-          <p:nvPr/>
-        </p:nvSpPr>
-        <p:spPr>
-          <a:xfrm>
-            <a:off x="6242304" y="1826772"/>
-            <a:ext cx="5437630" cy="182880"/>
-          </a:xfrm>
-          <a:prstGeom prst="rect">
-            <a:avLst/>
-          </a:prstGeom>
-          <a:noFill/>
-        </p:spPr>
-        <p:txBody>
-          <a:bodyPr wrap="square" lIns="0" rIns="0" tIns="0" bIns="0" anchor="t">
-            <a:spAutoFit/>
-          </a:bodyPr>
-          <a:lstStyle/>
-          <a:p>
-            <a:pPr algn="l">
-              <a:lnSpc>
-                <a:spcPct val="128000"/>
-              </a:lnSpc>
-            </a:pPr>
-            <a:r>
-              <a:rPr sz="900" b="1" i="0">
+              <a:rPr sz="1100" b="1" i="0">
                 <a:solidFill>
                   <a:srgbClr val="4E6584"/>
                 </a:solidFill>
@@ -9523,14 +9387,14 @@
       </p:sp>
       <p:sp>
         <p:nvSpPr>
-          <p:cNvPr id="49" name="Rectangle 48"/>
+          <p:cNvPr id="4" name="Rectangle 3"/>
           <p:cNvSpPr/>
           <p:nvPr/>
         </p:nvSpPr>
         <p:spPr>
           <a:xfrm>
-            <a:off x="6242304" y="2037085"/>
-            <a:ext cx="50292" cy="182880"/>
+            <a:off x="512065" y="1902464"/>
+            <a:ext cx="50292" cy="201168"/>
           </a:xfrm>
           <a:prstGeom prst="rect">
             <a:avLst/>
@@ -9567,14 +9431,14 @@
       </p:sp>
       <p:sp>
         <p:nvSpPr>
-          <p:cNvPr id="50" name="TextBox 49"/>
+          <p:cNvPr id="5" name="TextBox 4"/>
           <p:cNvSpPr txBox="1"/>
           <p:nvPr/>
         </p:nvSpPr>
         <p:spPr>
           <a:xfrm>
-            <a:off x="6388608" y="2018797"/>
-            <a:ext cx="5291325" cy="219456"/>
+            <a:off x="658369" y="1884176"/>
+            <a:ext cx="6182560" cy="237744"/>
           </a:xfrm>
           <a:prstGeom prst="rect">
             <a:avLst/>
@@ -9593,7 +9457,7 @@
               </a:lnSpc>
             </a:pPr>
             <a:r>
-              <a:rPr sz="1300" b="1" i="0">
+              <a:rPr sz="1400" b="1" i="0">
                 <a:solidFill>
                   <a:srgbClr val="003669"/>
                 </a:solidFill>
@@ -9608,14 +9472,14 @@
       </p:sp>
       <p:sp>
         <p:nvSpPr>
-          <p:cNvPr id="51" name="Rounded Rectangle 50"/>
+          <p:cNvPr id="6" name="Rounded Rectangle 5"/>
           <p:cNvSpPr/>
           <p:nvPr/>
         </p:nvSpPr>
         <p:spPr>
           <a:xfrm>
-            <a:off x="6487315" y="2256541"/>
-            <a:ext cx="4947607" cy="2260605"/>
+            <a:off x="512065" y="2195073"/>
+            <a:ext cx="6328865" cy="2855975"/>
           </a:xfrm>
           <a:prstGeom prst="roundRect">
             <a:avLst>
@@ -9656,7 +9520,7 @@
       </p:sp>
       <p:pic>
         <p:nvPicPr>
-          <p:cNvPr id="52" name="Picture 51" descr="巡检管理系统.png"/>
+          <p:cNvPr id="7" name="Picture 6" descr="巡检管理系统.png"/>
           <p:cNvPicPr>
             <a:picLocks noChangeAspect="1"/>
           </p:cNvPicPr>
@@ -9670,8 +9534,8 @@
         </p:blipFill>
         <p:spPr>
           <a:xfrm>
-            <a:off x="6551324" y="2348139"/>
-            <a:ext cx="4819590" cy="2077409"/>
+            <a:off x="576073" y="2286671"/>
+            <a:ext cx="6200849" cy="2672779"/>
           </a:xfrm>
           <a:prstGeom prst="rect">
             <a:avLst/>
@@ -9680,14 +9544,14 @@
       </p:pic>
       <p:sp>
         <p:nvSpPr>
-          <p:cNvPr id="53" name="TextBox 52"/>
+          <p:cNvPr id="8" name="TextBox 7"/>
           <p:cNvSpPr txBox="1"/>
           <p:nvPr/>
         </p:nvSpPr>
         <p:spPr>
           <a:xfrm>
-            <a:off x="6242304" y="4608587"/>
-            <a:ext cx="5437630" cy="201168"/>
+            <a:off x="512065" y="5105913"/>
+            <a:ext cx="6328865" cy="256032"/>
           </a:xfrm>
           <a:prstGeom prst="rect">
             <a:avLst/>
@@ -9702,11 +9566,11 @@
           <a:p>
             <a:pPr algn="l">
               <a:lnSpc>
-                <a:spcPct val="128000"/>
+                <a:spcPct val="125000"/>
               </a:lnSpc>
             </a:pPr>
             <a:r>
-              <a:rPr sz="850" b="0" i="0">
+              <a:rPr sz="1000" b="0" i="0">
                 <a:solidFill>
                   <a:srgbClr val="4E6584"/>
                 </a:solidFill>
@@ -9714,21 +9578,21 @@
                 <a:ea typeface="微软雅黑"/>
                 <a:cs typeface="Arial"/>
               </a:rPr>
-              <a:t>系统界面：EHS 隐患排查台账（截图内查询区间 2026-01-01 至 2026-07-30）</a:t>
-            </a:r>
-          </a:p>
-        </p:txBody>
-      </p:sp>
-      <p:sp>
-        <p:nvSpPr>
-          <p:cNvPr id="54" name="Rectangle 53"/>
+              <a:t>EHS 隐患排查台账（查询区间 2026-01-01 至 2026-07-30；截图显示累计 35,684 条）</a:t>
+            </a:r>
+          </a:p>
+        </p:txBody>
+      </p:sp>
+      <p:sp>
+        <p:nvSpPr>
+          <p:cNvPr id="9" name="Rectangle 8"/>
           <p:cNvSpPr/>
           <p:nvPr/>
         </p:nvSpPr>
         <p:spPr>
           <a:xfrm>
-            <a:off x="6242304" y="4901196"/>
-            <a:ext cx="50292" cy="182880"/>
+            <a:off x="7096963" y="1902464"/>
+            <a:ext cx="50292" cy="201168"/>
           </a:xfrm>
           <a:prstGeom prst="rect">
             <a:avLst/>
@@ -9765,14 +9629,14 @@
       </p:sp>
       <p:sp>
         <p:nvSpPr>
-          <p:cNvPr id="55" name="TextBox 54"/>
+          <p:cNvPr id="10" name="TextBox 9"/>
           <p:cNvSpPr txBox="1"/>
           <p:nvPr/>
         </p:nvSpPr>
         <p:spPr>
           <a:xfrm>
-            <a:off x="6388608" y="4882908"/>
-            <a:ext cx="5291325" cy="219456"/>
+            <a:off x="7243267" y="1884176"/>
+            <a:ext cx="4436667" cy="237744"/>
           </a:xfrm>
           <a:prstGeom prst="rect">
             <a:avLst/>
@@ -9791,7 +9655,7 @@
               </a:lnSpc>
             </a:pPr>
             <a:r>
-              <a:rPr sz="1300" b="1" i="0">
+              <a:rPr sz="1400" b="1" i="0">
                 <a:solidFill>
                   <a:srgbClr val="003669"/>
                 </a:solidFill>
@@ -9806,20 +9670,22 @@
       </p:sp>
       <p:sp>
         <p:nvSpPr>
-          <p:cNvPr id="56" name="Rectangle 55"/>
+          <p:cNvPr id="11" name="Rounded Rectangle 10"/>
           <p:cNvSpPr/>
           <p:nvPr/>
         </p:nvSpPr>
         <p:spPr>
           <a:xfrm>
-            <a:off x="6242304" y="5120652"/>
-            <a:ext cx="50292" cy="210312"/>
-          </a:xfrm>
-          <a:prstGeom prst="rect">
-            <a:avLst/>
+            <a:off x="7096963" y="2213361"/>
+            <a:ext cx="4582971" cy="909703"/>
+          </a:xfrm>
+          <a:prstGeom prst="roundRect">
+            <a:avLst>
+              <a:gd name="adj" fmla="val 4500"/>
+            </a:avLst>
           </a:prstGeom>
           <a:solidFill>
-            <a:srgbClr val="3263A7"/>
+            <a:srgbClr val="EEF3FA"/>
           </a:solidFill>
           <a:ln>
             <a:noFill/>
@@ -9850,96 +9716,14 @@
       </p:sp>
       <p:sp>
         <p:nvSpPr>
-          <p:cNvPr id="57" name="TextBox 56"/>
-          <p:cNvSpPr txBox="1"/>
-          <p:nvPr/>
-        </p:nvSpPr>
-        <p:spPr>
-          <a:xfrm>
-            <a:off x="6388608" y="5120652"/>
-            <a:ext cx="1325883" cy="210312"/>
-          </a:xfrm>
-          <a:prstGeom prst="rect">
-            <a:avLst/>
-          </a:prstGeom>
-          <a:noFill/>
-        </p:spPr>
-        <p:txBody>
-          <a:bodyPr wrap="square" lIns="0" rIns="0" tIns="0" bIns="0" anchor="ctr">
-            <a:spAutoFit/>
-          </a:bodyPr>
-          <a:lstStyle/>
-          <a:p>
-            <a:pPr algn="l">
-              <a:lnSpc>
-                <a:spcPct val="128000"/>
-              </a:lnSpc>
-            </a:pPr>
-            <a:r>
-              <a:rPr sz="950" b="1" i="0">
-                <a:solidFill>
-                  <a:srgbClr val="003669"/>
-                </a:solidFill>
-                <a:latin typeface="Arial"/>
-                <a:ea typeface="微软雅黑"/>
-                <a:cs typeface="Arial"/>
-              </a:rPr>
-              <a:t>隐患全过程留痕</a:t>
-            </a:r>
-          </a:p>
-        </p:txBody>
-      </p:sp>
-      <p:sp>
-        <p:nvSpPr>
-          <p:cNvPr id="58" name="TextBox 57"/>
-          <p:cNvSpPr txBox="1"/>
-          <p:nvPr/>
-        </p:nvSpPr>
-        <p:spPr>
-          <a:xfrm>
-            <a:off x="7778500" y="5120652"/>
-            <a:ext cx="3901434" cy="210312"/>
-          </a:xfrm>
-          <a:prstGeom prst="rect">
-            <a:avLst/>
-          </a:prstGeom>
-          <a:noFill/>
-        </p:spPr>
-        <p:txBody>
-          <a:bodyPr wrap="square" lIns="0" rIns="0" tIns="0" bIns="0" anchor="ctr">
-            <a:spAutoFit/>
-          </a:bodyPr>
-          <a:lstStyle/>
-          <a:p>
-            <a:pPr algn="l">
-              <a:lnSpc>
-                <a:spcPct val="126000"/>
-              </a:lnSpc>
-            </a:pPr>
-            <a:r>
-              <a:rPr sz="850" b="0" i="0">
-                <a:solidFill>
-                  <a:srgbClr val="4E6584"/>
-                </a:solidFill>
-                <a:latin typeface="Arial"/>
-                <a:ea typeface="微软雅黑"/>
-                <a:cs typeface="Arial"/>
-              </a:rPr>
-              <a:t>逐条记录巡查主题、部门、巡查人、地点、巡查发现、分类与等级</a:t>
-            </a:r>
-          </a:p>
-        </p:txBody>
-      </p:sp>
-      <p:sp>
-        <p:nvSpPr>
-          <p:cNvPr id="59" name="Rectangle 58"/>
+          <p:cNvPr id="12" name="Rectangle 11"/>
           <p:cNvSpPr/>
           <p:nvPr/>
         </p:nvSpPr>
         <p:spPr>
           <a:xfrm>
-            <a:off x="6242304" y="5385829"/>
-            <a:ext cx="50292" cy="210312"/>
+            <a:off x="7243267" y="2341377"/>
+            <a:ext cx="45720" cy="182880"/>
           </a:xfrm>
           <a:prstGeom prst="rect">
             <a:avLst/>
@@ -9976,14 +9760,14 @@
       </p:sp>
       <p:sp>
         <p:nvSpPr>
-          <p:cNvPr id="60" name="TextBox 59"/>
+          <p:cNvPr id="13" name="TextBox 12"/>
           <p:cNvSpPr txBox="1"/>
           <p:nvPr/>
         </p:nvSpPr>
         <p:spPr>
           <a:xfrm>
-            <a:off x="6388608" y="5385829"/>
-            <a:ext cx="1325883" cy="210312"/>
+            <a:off x="7371283" y="2304801"/>
+            <a:ext cx="4162346" cy="256032"/>
           </a:xfrm>
           <a:prstGeom prst="rect">
             <a:avLst/>
@@ -9991,7 +9775,7 @@
           <a:noFill/>
         </p:spPr>
         <p:txBody>
-          <a:bodyPr wrap="square" lIns="0" rIns="0" tIns="0" bIns="0" anchor="ctr">
+          <a:bodyPr wrap="square" lIns="0" rIns="0" tIns="0" bIns="0" anchor="t">
             <a:spAutoFit/>
           </a:bodyPr>
           <a:lstStyle/>
@@ -10002,7 +9786,7 @@
               </a:lnSpc>
             </a:pPr>
             <a:r>
-              <a:rPr sz="950" b="1" i="0">
+              <a:rPr sz="1300" b="1" i="0">
                 <a:solidFill>
                   <a:srgbClr val="003669"/>
                 </a:solidFill>
@@ -10010,21 +9794,21 @@
                 <a:ea typeface="微软雅黑"/>
                 <a:cs typeface="Arial"/>
               </a:rPr>
-              <a:t>三类巡查统一入口</a:t>
-            </a:r>
-          </a:p>
-        </p:txBody>
-      </p:sp>
-      <p:sp>
-        <p:nvSpPr>
-          <p:cNvPr id="61" name="TextBox 60"/>
+              <a:t>隐患全过程留痕</a:t>
+            </a:r>
+          </a:p>
+        </p:txBody>
+      </p:sp>
+      <p:sp>
+        <p:nvSpPr>
+          <p:cNvPr id="14" name="TextBox 13"/>
           <p:cNvSpPr txBox="1"/>
           <p:nvPr/>
         </p:nvSpPr>
         <p:spPr>
           <a:xfrm>
-            <a:off x="7778500" y="5385829"/>
-            <a:ext cx="3901434" cy="210312"/>
+            <a:off x="7243267" y="2597410"/>
+            <a:ext cx="4290362" cy="434214"/>
           </a:xfrm>
           <a:prstGeom prst="rect">
             <a:avLst/>
@@ -10032,46 +9816,48 @@
           <a:noFill/>
         </p:spPr>
         <p:txBody>
-          <a:bodyPr wrap="square" lIns="0" rIns="0" tIns="0" bIns="0" anchor="ctr">
+          <a:bodyPr wrap="square" lIns="0" rIns="0" tIns="0" bIns="0" anchor="t">
             <a:spAutoFit/>
           </a:bodyPr>
           <a:lstStyle/>
           <a:p>
             <a:pPr algn="l">
               <a:lnSpc>
-                <a:spcPct val="126000"/>
+                <a:spcPct val="130000"/>
               </a:lnSpc>
             </a:pPr>
             <a:r>
-              <a:rPr sz="850" b="0" i="0">
-                <a:solidFill>
-                  <a:srgbClr val="4E6584"/>
+              <a:rPr sz="1100" b="0" i="0">
+                <a:solidFill>
+                  <a:srgbClr val="16283F"/>
                 </a:solidFill>
                 <a:latin typeface="Arial"/>
                 <a:ea typeface="微软雅黑"/>
                 <a:cs typeface="Arial"/>
               </a:rPr>
-              <a:t>EHS 隐患排查、QA 日常巡查、生产日常巡查在同一系统内管理</a:t>
-            </a:r>
-          </a:p>
-        </p:txBody>
-      </p:sp>
-      <p:sp>
-        <p:nvSpPr>
-          <p:cNvPr id="62" name="Rectangle 61"/>
+              <a:t>逐条记录巡查主题、组织部门、巡查人、隐患地点、巡查发现、隐患分类与隐患等级</a:t>
+            </a:r>
+          </a:p>
+        </p:txBody>
+      </p:sp>
+      <p:sp>
+        <p:nvSpPr>
+          <p:cNvPr id="15" name="Rounded Rectangle 14"/>
           <p:cNvSpPr/>
           <p:nvPr/>
         </p:nvSpPr>
         <p:spPr>
           <a:xfrm>
-            <a:off x="6242304" y="5651006"/>
-            <a:ext cx="50292" cy="210312"/>
-          </a:xfrm>
-          <a:prstGeom prst="rect">
-            <a:avLst/>
+            <a:off x="7096963" y="3232793"/>
+            <a:ext cx="4582971" cy="909703"/>
+          </a:xfrm>
+          <a:prstGeom prst="roundRect">
+            <a:avLst>
+              <a:gd name="adj" fmla="val 4500"/>
+            </a:avLst>
           </a:prstGeom>
           <a:solidFill>
-            <a:srgbClr val="3263A7"/>
+            <a:srgbClr val="EEF3FA"/>
           </a:solidFill>
           <a:ln>
             <a:noFill/>
@@ -10102,96 +9888,14 @@
       </p:sp>
       <p:sp>
         <p:nvSpPr>
-          <p:cNvPr id="63" name="TextBox 62"/>
-          <p:cNvSpPr txBox="1"/>
-          <p:nvPr/>
-        </p:nvSpPr>
-        <p:spPr>
-          <a:xfrm>
-            <a:off x="6388608" y="5651006"/>
-            <a:ext cx="1325883" cy="210312"/>
-          </a:xfrm>
-          <a:prstGeom prst="rect">
-            <a:avLst/>
-          </a:prstGeom>
-          <a:noFill/>
-        </p:spPr>
-        <p:txBody>
-          <a:bodyPr wrap="square" lIns="0" rIns="0" tIns="0" bIns="0" anchor="ctr">
-            <a:spAutoFit/>
-          </a:bodyPr>
-          <a:lstStyle/>
-          <a:p>
-            <a:pPr algn="l">
-              <a:lnSpc>
-                <a:spcPct val="128000"/>
-              </a:lnSpc>
-            </a:pPr>
-            <a:r>
-              <a:rPr sz="950" b="1" i="0">
-                <a:solidFill>
-                  <a:srgbClr val="003669"/>
-                </a:solidFill>
-                <a:latin typeface="Arial"/>
-                <a:ea typeface="微软雅黑"/>
-                <a:cs typeface="Arial"/>
-              </a:rPr>
-              <a:t>多维度统计分析</a:t>
-            </a:r>
-          </a:p>
-        </p:txBody>
-      </p:sp>
-      <p:sp>
-        <p:nvSpPr>
-          <p:cNvPr id="64" name="TextBox 63"/>
-          <p:cNvSpPr txBox="1"/>
-          <p:nvPr/>
-        </p:nvSpPr>
-        <p:spPr>
-          <a:xfrm>
-            <a:off x="7778500" y="5651006"/>
-            <a:ext cx="3901434" cy="210312"/>
-          </a:xfrm>
-          <a:prstGeom prst="rect">
-            <a:avLst/>
-          </a:prstGeom>
-          <a:noFill/>
-        </p:spPr>
-        <p:txBody>
-          <a:bodyPr wrap="square" lIns="0" rIns="0" tIns="0" bIns="0" anchor="ctr">
-            <a:spAutoFit/>
-          </a:bodyPr>
-          <a:lstStyle/>
-          <a:p>
-            <a:pPr algn="l">
-              <a:lnSpc>
-                <a:spcPct val="126000"/>
-              </a:lnSpc>
-            </a:pPr>
-            <a:r>
-              <a:rPr sz="850" b="0" i="0">
-                <a:solidFill>
-                  <a:srgbClr val="4E6584"/>
-                </a:solidFill>
-                <a:latin typeface="Arial"/>
-                <a:ea typeface="微软雅黑"/>
-                <a:cs typeface="Arial"/>
-              </a:rPr>
-              <a:t>支持按厂区、部门、巡查人、整改责任人、第一责任人分别统计</a:t>
-            </a:r>
-          </a:p>
-        </p:txBody>
-      </p:sp>
-      <p:sp>
-        <p:nvSpPr>
-          <p:cNvPr id="65" name="Rectangle 64"/>
+          <p:cNvPr id="16" name="Rectangle 15"/>
           <p:cNvSpPr/>
           <p:nvPr/>
         </p:nvSpPr>
         <p:spPr>
           <a:xfrm>
-            <a:off x="6242304" y="5916182"/>
-            <a:ext cx="50292" cy="210312"/>
+            <a:off x="7243267" y="3360809"/>
+            <a:ext cx="45720" cy="182880"/>
           </a:xfrm>
           <a:prstGeom prst="rect">
             <a:avLst/>
@@ -10228,14 +9932,14 @@
       </p:sp>
       <p:sp>
         <p:nvSpPr>
-          <p:cNvPr id="66" name="TextBox 65"/>
+          <p:cNvPr id="17" name="TextBox 16"/>
           <p:cNvSpPr txBox="1"/>
           <p:nvPr/>
         </p:nvSpPr>
         <p:spPr>
           <a:xfrm>
-            <a:off x="6388608" y="5916182"/>
-            <a:ext cx="1325883" cy="210312"/>
+            <a:off x="7371283" y="3324233"/>
+            <a:ext cx="4162346" cy="256032"/>
           </a:xfrm>
           <a:prstGeom prst="rect">
             <a:avLst/>
@@ -10243,7 +9947,7 @@
           <a:noFill/>
         </p:spPr>
         <p:txBody>
-          <a:bodyPr wrap="square" lIns="0" rIns="0" tIns="0" bIns="0" anchor="ctr">
+          <a:bodyPr wrap="square" lIns="0" rIns="0" tIns="0" bIns="0" anchor="t">
             <a:spAutoFit/>
           </a:bodyPr>
           <a:lstStyle/>
@@ -10254,7 +9958,351 @@
               </a:lnSpc>
             </a:pPr>
             <a:r>
-              <a:rPr sz="950" b="1" i="0">
+              <a:rPr sz="1300" b="1" i="0">
+                <a:solidFill>
+                  <a:srgbClr val="003669"/>
+                </a:solidFill>
+                <a:latin typeface="Arial"/>
+                <a:ea typeface="微软雅黑"/>
+                <a:cs typeface="Arial"/>
+              </a:rPr>
+              <a:t>三类巡查统一入口</a:t>
+            </a:r>
+          </a:p>
+        </p:txBody>
+      </p:sp>
+      <p:sp>
+        <p:nvSpPr>
+          <p:cNvPr id="18" name="TextBox 17"/>
+          <p:cNvSpPr txBox="1"/>
+          <p:nvPr/>
+        </p:nvSpPr>
+        <p:spPr>
+          <a:xfrm>
+            <a:off x="7243267" y="3616842"/>
+            <a:ext cx="4290362" cy="434214"/>
+          </a:xfrm>
+          <a:prstGeom prst="rect">
+            <a:avLst/>
+          </a:prstGeom>
+          <a:noFill/>
+        </p:spPr>
+        <p:txBody>
+          <a:bodyPr wrap="square" lIns="0" rIns="0" tIns="0" bIns="0" anchor="t">
+            <a:spAutoFit/>
+          </a:bodyPr>
+          <a:lstStyle/>
+          <a:p>
+            <a:pPr algn="l">
+              <a:lnSpc>
+                <a:spcPct val="130000"/>
+              </a:lnSpc>
+            </a:pPr>
+            <a:r>
+              <a:rPr sz="1100" b="0" i="0">
+                <a:solidFill>
+                  <a:srgbClr val="16283F"/>
+                </a:solidFill>
+                <a:latin typeface="Arial"/>
+                <a:ea typeface="微软雅黑"/>
+                <a:cs typeface="Arial"/>
+              </a:rPr>
+              <a:t>EHS 隐患排查、QA 日常巡查、生产日常巡查在同一系统内管理</a:t>
+            </a:r>
+          </a:p>
+        </p:txBody>
+      </p:sp>
+      <p:sp>
+        <p:nvSpPr>
+          <p:cNvPr id="19" name="Rounded Rectangle 18"/>
+          <p:cNvSpPr/>
+          <p:nvPr/>
+        </p:nvSpPr>
+        <p:spPr>
+          <a:xfrm>
+            <a:off x="7096963" y="4252224"/>
+            <a:ext cx="4582971" cy="909703"/>
+          </a:xfrm>
+          <a:prstGeom prst="roundRect">
+            <a:avLst>
+              <a:gd name="adj" fmla="val 4500"/>
+            </a:avLst>
+          </a:prstGeom>
+          <a:solidFill>
+            <a:srgbClr val="EEF3FA"/>
+          </a:solidFill>
+          <a:ln>
+            <a:noFill/>
+          </a:ln>
+          <a:effectLst/>
+        </p:spPr>
+        <p:style>
+          <a:lnRef idx="1">
+            <a:schemeClr val="accent1"/>
+          </a:lnRef>
+          <a:fillRef idx="3">
+            <a:schemeClr val="accent1"/>
+          </a:fillRef>
+          <a:effectRef idx="2">
+            <a:schemeClr val="accent1"/>
+          </a:effectRef>
+          <a:fontRef idx="minor">
+            <a:schemeClr val="lt1"/>
+          </a:fontRef>
+        </p:style>
+        <p:txBody>
+          <a:bodyPr rtlCol="0" anchor="ctr" wrap="square"/>
+          <a:lstStyle/>
+          <a:p>
+            <a:pPr algn="ctr"/>
+          </a:p>
+        </p:txBody>
+      </p:sp>
+      <p:sp>
+        <p:nvSpPr>
+          <p:cNvPr id="20" name="Rectangle 19"/>
+          <p:cNvSpPr/>
+          <p:nvPr/>
+        </p:nvSpPr>
+        <p:spPr>
+          <a:xfrm>
+            <a:off x="7243267" y="4380240"/>
+            <a:ext cx="45720" cy="182880"/>
+          </a:xfrm>
+          <a:prstGeom prst="rect">
+            <a:avLst/>
+          </a:prstGeom>
+          <a:solidFill>
+            <a:srgbClr val="3263A7"/>
+          </a:solidFill>
+          <a:ln>
+            <a:noFill/>
+          </a:ln>
+          <a:effectLst/>
+        </p:spPr>
+        <p:style>
+          <a:lnRef idx="1">
+            <a:schemeClr val="accent1"/>
+          </a:lnRef>
+          <a:fillRef idx="3">
+            <a:schemeClr val="accent1"/>
+          </a:fillRef>
+          <a:effectRef idx="2">
+            <a:schemeClr val="accent1"/>
+          </a:effectRef>
+          <a:fontRef idx="minor">
+            <a:schemeClr val="lt1"/>
+          </a:fontRef>
+        </p:style>
+        <p:txBody>
+          <a:bodyPr rtlCol="0" anchor="ctr" wrap="square"/>
+          <a:lstStyle/>
+          <a:p>
+            <a:pPr algn="ctr"/>
+          </a:p>
+        </p:txBody>
+      </p:sp>
+      <p:sp>
+        <p:nvSpPr>
+          <p:cNvPr id="21" name="TextBox 20"/>
+          <p:cNvSpPr txBox="1"/>
+          <p:nvPr/>
+        </p:nvSpPr>
+        <p:spPr>
+          <a:xfrm>
+            <a:off x="7371283" y="4343664"/>
+            <a:ext cx="4162346" cy="256032"/>
+          </a:xfrm>
+          <a:prstGeom prst="rect">
+            <a:avLst/>
+          </a:prstGeom>
+          <a:noFill/>
+        </p:spPr>
+        <p:txBody>
+          <a:bodyPr wrap="square" lIns="0" rIns="0" tIns="0" bIns="0" anchor="t">
+            <a:spAutoFit/>
+          </a:bodyPr>
+          <a:lstStyle/>
+          <a:p>
+            <a:pPr algn="l">
+              <a:lnSpc>
+                <a:spcPct val="128000"/>
+              </a:lnSpc>
+            </a:pPr>
+            <a:r>
+              <a:rPr sz="1300" b="1" i="0">
+                <a:solidFill>
+                  <a:srgbClr val="003669"/>
+                </a:solidFill>
+                <a:latin typeface="Arial"/>
+                <a:ea typeface="微软雅黑"/>
+                <a:cs typeface="Arial"/>
+              </a:rPr>
+              <a:t>多维度统计分析</a:t>
+            </a:r>
+          </a:p>
+        </p:txBody>
+      </p:sp>
+      <p:sp>
+        <p:nvSpPr>
+          <p:cNvPr id="22" name="TextBox 21"/>
+          <p:cNvSpPr txBox="1"/>
+          <p:nvPr/>
+        </p:nvSpPr>
+        <p:spPr>
+          <a:xfrm>
+            <a:off x="7243267" y="4636273"/>
+            <a:ext cx="4290362" cy="434214"/>
+          </a:xfrm>
+          <a:prstGeom prst="rect">
+            <a:avLst/>
+          </a:prstGeom>
+          <a:noFill/>
+        </p:spPr>
+        <p:txBody>
+          <a:bodyPr wrap="square" lIns="0" rIns="0" tIns="0" bIns="0" anchor="t">
+            <a:spAutoFit/>
+          </a:bodyPr>
+          <a:lstStyle/>
+          <a:p>
+            <a:pPr algn="l">
+              <a:lnSpc>
+                <a:spcPct val="130000"/>
+              </a:lnSpc>
+            </a:pPr>
+            <a:r>
+              <a:rPr sz="1100" b="0" i="0">
+                <a:solidFill>
+                  <a:srgbClr val="16283F"/>
+                </a:solidFill>
+                <a:latin typeface="Arial"/>
+                <a:ea typeface="微软雅黑"/>
+                <a:cs typeface="Arial"/>
+              </a:rPr>
+              <a:t>支持按厂区、部门、巡查人、整改责任人、第一责任人分别统计</a:t>
+            </a:r>
+          </a:p>
+        </p:txBody>
+      </p:sp>
+      <p:sp>
+        <p:nvSpPr>
+          <p:cNvPr id="23" name="Rounded Rectangle 22"/>
+          <p:cNvSpPr/>
+          <p:nvPr/>
+        </p:nvSpPr>
+        <p:spPr>
+          <a:xfrm>
+            <a:off x="7096963" y="5271656"/>
+            <a:ext cx="4582971" cy="909703"/>
+          </a:xfrm>
+          <a:prstGeom prst="roundRect">
+            <a:avLst>
+              <a:gd name="adj" fmla="val 4500"/>
+            </a:avLst>
+          </a:prstGeom>
+          <a:solidFill>
+            <a:srgbClr val="EEF3FA"/>
+          </a:solidFill>
+          <a:ln>
+            <a:noFill/>
+          </a:ln>
+          <a:effectLst/>
+        </p:spPr>
+        <p:style>
+          <a:lnRef idx="1">
+            <a:schemeClr val="accent1"/>
+          </a:lnRef>
+          <a:fillRef idx="3">
+            <a:schemeClr val="accent1"/>
+          </a:fillRef>
+          <a:effectRef idx="2">
+            <a:schemeClr val="accent1"/>
+          </a:effectRef>
+          <a:fontRef idx="minor">
+            <a:schemeClr val="lt1"/>
+          </a:fontRef>
+        </p:style>
+        <p:txBody>
+          <a:bodyPr rtlCol="0" anchor="ctr" wrap="square"/>
+          <a:lstStyle/>
+          <a:p>
+            <a:pPr algn="ctr"/>
+          </a:p>
+        </p:txBody>
+      </p:sp>
+      <p:sp>
+        <p:nvSpPr>
+          <p:cNvPr id="24" name="Rectangle 23"/>
+          <p:cNvSpPr/>
+          <p:nvPr/>
+        </p:nvSpPr>
+        <p:spPr>
+          <a:xfrm>
+            <a:off x="7243267" y="5399672"/>
+            <a:ext cx="45720" cy="182880"/>
+          </a:xfrm>
+          <a:prstGeom prst="rect">
+            <a:avLst/>
+          </a:prstGeom>
+          <a:solidFill>
+            <a:srgbClr val="3263A7"/>
+          </a:solidFill>
+          <a:ln>
+            <a:noFill/>
+          </a:ln>
+          <a:effectLst/>
+        </p:spPr>
+        <p:style>
+          <a:lnRef idx="1">
+            <a:schemeClr val="accent1"/>
+          </a:lnRef>
+          <a:fillRef idx="3">
+            <a:schemeClr val="accent1"/>
+          </a:fillRef>
+          <a:effectRef idx="2">
+            <a:schemeClr val="accent1"/>
+          </a:effectRef>
+          <a:fontRef idx="minor">
+            <a:schemeClr val="lt1"/>
+          </a:fontRef>
+        </p:style>
+        <p:txBody>
+          <a:bodyPr rtlCol="0" anchor="ctr" wrap="square"/>
+          <a:lstStyle/>
+          <a:p>
+            <a:pPr algn="ctr"/>
+          </a:p>
+        </p:txBody>
+      </p:sp>
+      <p:sp>
+        <p:nvSpPr>
+          <p:cNvPr id="25" name="TextBox 24"/>
+          <p:cNvSpPr txBox="1"/>
+          <p:nvPr/>
+        </p:nvSpPr>
+        <p:spPr>
+          <a:xfrm>
+            <a:off x="7371283" y="5363096"/>
+            <a:ext cx="4162346" cy="256032"/>
+          </a:xfrm>
+          <a:prstGeom prst="rect">
+            <a:avLst/>
+          </a:prstGeom>
+          <a:noFill/>
+        </p:spPr>
+        <p:txBody>
+          <a:bodyPr wrap="square" lIns="0" rIns="0" tIns="0" bIns="0" anchor="t">
+            <a:spAutoFit/>
+          </a:bodyPr>
+          <a:lstStyle/>
+          <a:p>
+            <a:pPr algn="l">
+              <a:lnSpc>
+                <a:spcPct val="128000"/>
+              </a:lnSpc>
+            </a:pPr>
+            <a:r>
+              <a:rPr sz="1300" b="1" i="0">
                 <a:solidFill>
                   <a:srgbClr val="003669"/>
                 </a:solidFill>
@@ -10269,14 +10317,14 @@
       </p:sp>
       <p:sp>
         <p:nvSpPr>
-          <p:cNvPr id="67" name="TextBox 66"/>
+          <p:cNvPr id="26" name="TextBox 25"/>
           <p:cNvSpPr txBox="1"/>
           <p:nvPr/>
         </p:nvSpPr>
         <p:spPr>
           <a:xfrm>
-            <a:off x="7778500" y="5916182"/>
-            <a:ext cx="3901434" cy="210312"/>
+            <a:off x="7243267" y="5655705"/>
+            <a:ext cx="4290362" cy="434214"/>
           </a:xfrm>
           <a:prstGeom prst="rect">
             <a:avLst/>
@@ -10284,20 +10332,20 @@
           <a:noFill/>
         </p:spPr>
         <p:txBody>
-          <a:bodyPr wrap="square" lIns="0" rIns="0" tIns="0" bIns="0" anchor="ctr">
+          <a:bodyPr wrap="square" lIns="0" rIns="0" tIns="0" bIns="0" anchor="t">
             <a:spAutoFit/>
           </a:bodyPr>
           <a:lstStyle/>
           <a:p>
             <a:pPr algn="l">
               <a:lnSpc>
-                <a:spcPct val="126000"/>
+                <a:spcPct val="130000"/>
               </a:lnSpc>
             </a:pPr>
             <a:r>
-              <a:rPr sz="850" b="0" i="0">
-                <a:solidFill>
-                  <a:srgbClr val="4E6584"/>
+              <a:rPr sz="1100" b="0" i="0">
+                <a:solidFill>
+                  <a:srgbClr val="16283F"/>
                 </a:solidFill>
                 <a:latin typeface="Arial"/>
                 <a:ea typeface="微软雅黑"/>
@@ -10310,14 +10358,14 @@
       </p:sp>
       <p:sp>
         <p:nvSpPr>
-          <p:cNvPr id="68" name="TextBox 67"/>
+          <p:cNvPr id="27" name="TextBox 26"/>
           <p:cNvSpPr txBox="1"/>
           <p:nvPr/>
         </p:nvSpPr>
         <p:spPr>
           <a:xfrm>
-            <a:off x="512065" y="6327663"/>
-            <a:ext cx="11164851" cy="182880"/>
+            <a:off x="512065" y="6309375"/>
+            <a:ext cx="9875544" cy="182880"/>
           </a:xfrm>
           <a:prstGeom prst="rect">
             <a:avLst/>
@@ -10336,7 +10384,7 @@
               </a:lnSpc>
             </a:pPr>
             <a:r>
-              <a:rPr sz="850" b="0" i="0">
+              <a:rPr sz="900" b="0" i="0">
                 <a:solidFill>
                   <a:srgbClr val="4E6584"/>
                 </a:solidFill>
@@ -10344,7 +10392,48 @@
                 <a:ea typeface="微软雅黑"/>
                 <a:cs typeface="Arial"/>
               </a:rPr>
-              <a:t>设备系统数据来自设备管理系统汇报材料；巡检系统信息取自系统界面截图</a:t>
+              <a:t>信息取自巡检管理系统界面截图</a:t>
+            </a:r>
+          </a:p>
+        </p:txBody>
+      </p:sp>
+      <p:sp>
+        <p:nvSpPr>
+          <p:cNvPr id="28" name="TextBox 27"/>
+          <p:cNvSpPr txBox="1"/>
+          <p:nvPr/>
+        </p:nvSpPr>
+        <p:spPr>
+          <a:xfrm>
+            <a:off x="10515626" y="6309375"/>
+            <a:ext cx="731521" cy="182880"/>
+          </a:xfrm>
+          <a:prstGeom prst="rect">
+            <a:avLst/>
+          </a:prstGeom>
+          <a:noFill/>
+        </p:spPr>
+        <p:txBody>
+          <a:bodyPr wrap="square" lIns="0" rIns="0" tIns="0" bIns="0" anchor="t">
+            <a:spAutoFit/>
+          </a:bodyPr>
+          <a:lstStyle/>
+          <a:p>
+            <a:pPr algn="r">
+              <a:lnSpc>
+                <a:spcPct val="128000"/>
+              </a:lnSpc>
+            </a:pPr>
+            <a:r>
+              <a:rPr sz="900" b="0" i="0">
+                <a:solidFill>
+                  <a:srgbClr val="4E6584"/>
+                </a:solidFill>
+                <a:latin typeface="Arial"/>
+                <a:ea typeface="微软雅黑"/>
+                <a:cs typeface="Arial"/>
+              </a:rPr>
+              <a:t>2 / 2</a:t>
             </a:r>
           </a:p>
         </p:txBody>

--- a/系统专篇/两系统建设进展.pptx
+++ b/系统专篇/两系统建设进展.pptx
@@ -10,7 +10,6 @@
   </p:notesMasterIdLst>
   <p:sldIdLst>
     <p:sldId id="256" r:id="rId3"/>
-    <p:sldId id="257" r:id="rId9"/>
   </p:sldIdLst>
   <p:sldSz cx="12192000" cy="6858000"/>
   <p:notesSz cx="6858000" cy="9144000"/>
@@ -7551,48 +7550,7 @@
         <p:spPr>
           <a:xfrm>
             <a:off x="512065" y="1097282"/>
-            <a:ext cx="11167869" cy="366268"/>
-          </a:xfrm>
-          <a:prstGeom prst="rect">
-            <a:avLst/>
-          </a:prstGeom>
-          <a:noFill/>
-        </p:spPr>
-        <p:txBody>
-          <a:bodyPr wrap="square" lIns="0" rIns="0" tIns="0" bIns="0" anchor="t">
-            <a:spAutoFit/>
-          </a:bodyPr>
-          <a:lstStyle/>
-          <a:p>
-            <a:pPr algn="l">
-              <a:lnSpc>
-                <a:spcPct val="118000"/>
-              </a:lnSpc>
-            </a:pPr>
-            <a:r>
-              <a:rPr sz="2200" b="1" i="0">
-                <a:solidFill>
-                  <a:srgbClr val="16283F"/>
-                </a:solidFill>
-                <a:latin typeface="Arial"/>
-                <a:ea typeface="微软雅黑"/>
-                <a:cs typeface="Arial"/>
-              </a:rPr>
-              <a:t>设备信息管理系统（EIMS）完成系统验证，预计 8 月上线</a:t>
-            </a:r>
-          </a:p>
-        </p:txBody>
-      </p:sp>
-      <p:sp>
-        <p:nvSpPr>
-          <p:cNvPr id="3" name="TextBox 2"/>
-          <p:cNvSpPr txBox="1"/>
-          <p:nvPr/>
-        </p:nvSpPr>
-        <p:spPr>
-          <a:xfrm>
-            <a:off x="512065" y="1609856"/>
-            <a:ext cx="11167869" cy="201168"/>
+            <a:ext cx="5019444" cy="237744"/>
           </a:xfrm>
           <a:prstGeom prst="rect">
             <a:avLst/>
@@ -7611,7 +7569,48 @@
               </a:lnSpc>
             </a:pPr>
             <a:r>
-              <a:rPr sz="1100" b="1" i="0">
+              <a:rPr sz="1600" b="1" i="0">
+                <a:solidFill>
+                  <a:srgbClr val="003669"/>
+                </a:solidFill>
+                <a:latin typeface="Arial"/>
+                <a:ea typeface="微软雅黑"/>
+                <a:cs typeface="Arial"/>
+              </a:rPr>
+              <a:t>设备信息管理系统（EIMS）</a:t>
+            </a:r>
+          </a:p>
+        </p:txBody>
+      </p:sp>
+      <p:sp>
+        <p:nvSpPr>
+          <p:cNvPr id="3" name="TextBox 2"/>
+          <p:cNvSpPr txBox="1"/>
+          <p:nvPr/>
+        </p:nvSpPr>
+        <p:spPr>
+          <a:xfrm>
+            <a:off x="512065" y="1353315"/>
+            <a:ext cx="5019444" cy="182880"/>
+          </a:xfrm>
+          <a:prstGeom prst="rect">
+            <a:avLst/>
+          </a:prstGeom>
+          <a:noFill/>
+        </p:spPr>
+        <p:txBody>
+          <a:bodyPr wrap="square" lIns="0" rIns="0" tIns="0" bIns="0" anchor="t">
+            <a:spAutoFit/>
+          </a:bodyPr>
+          <a:lstStyle/>
+          <a:p>
+            <a:pPr algn="l">
+              <a:lnSpc>
+                <a:spcPct val="128000"/>
+              </a:lnSpc>
+            </a:pPr>
+            <a:r>
+              <a:rPr sz="950" b="1" i="0">
                 <a:solidFill>
                   <a:srgbClr val="4E6584"/>
                 </a:solidFill>
@@ -7632,8 +7631,8 @@
         </p:nvSpPr>
         <p:spPr>
           <a:xfrm>
-            <a:off x="512065" y="1902464"/>
-            <a:ext cx="50292" cy="201168"/>
+            <a:off x="512065" y="1591059"/>
+            <a:ext cx="50292" cy="182880"/>
           </a:xfrm>
           <a:prstGeom prst="rect">
             <a:avLst/>
@@ -7676,8 +7675,8 @@
         </p:nvSpPr>
         <p:spPr>
           <a:xfrm>
-            <a:off x="658369" y="1884176"/>
-            <a:ext cx="11021565" cy="237744"/>
+            <a:off x="658369" y="1572771"/>
+            <a:ext cx="4873140" cy="219456"/>
           </a:xfrm>
           <a:prstGeom prst="rect">
             <a:avLst/>
@@ -7696,7 +7695,7 @@
               </a:lnSpc>
             </a:pPr>
             <a:r>
-              <a:rPr sz="1400" b="1" i="0">
+              <a:rPr sz="1300" b="1" i="0">
                 <a:solidFill>
                   <a:srgbClr val="003669"/>
                 </a:solidFill>
@@ -7717,8 +7716,8 @@
         </p:nvSpPr>
         <p:spPr>
           <a:xfrm>
-            <a:off x="512065" y="2176785"/>
-            <a:ext cx="5492494" cy="914402"/>
+            <a:off x="512065" y="1828804"/>
+            <a:ext cx="2445714" cy="841250"/>
           </a:xfrm>
           <a:prstGeom prst="roundRect">
             <a:avLst>
@@ -7763,8 +7762,8 @@
         </p:nvSpPr>
         <p:spPr>
           <a:xfrm>
-            <a:off x="694945" y="2286513"/>
-            <a:ext cx="5126733" cy="190500"/>
+            <a:off x="640081" y="1920244"/>
+            <a:ext cx="2189681" cy="162687"/>
           </a:xfrm>
           <a:prstGeom prst="rect">
             <a:avLst/>
@@ -7779,11 +7778,11 @@
           <a:p>
             <a:pPr algn="l">
               <a:lnSpc>
-                <a:spcPct val="120000"/>
+                <a:spcPct val="122000"/>
               </a:lnSpc>
             </a:pPr>
             <a:r>
-              <a:rPr sz="1250" b="1" i="0">
+              <a:rPr sz="1050" b="1" i="0">
                 <a:solidFill>
                   <a:srgbClr val="003669"/>
                 </a:solidFill>
@@ -7791,7 +7790,7 @@
                 <a:ea typeface="微软雅黑"/>
                 <a:cs typeface="Arial"/>
               </a:rPr>
-              <a:t>设备信息管理系统 (EIMS）完成验证 - 设备预防性维护</a:t>
+              <a:t>EIMS 完成验证 · 设备预防性维护</a:t>
             </a:r>
           </a:p>
         </p:txBody>
@@ -7804,8 +7803,8 @@
         </p:nvSpPr>
         <p:spPr>
           <a:xfrm>
-            <a:off x="694945" y="2531878"/>
-            <a:ext cx="5126733" cy="449581"/>
+            <a:off x="640081" y="2119508"/>
+            <a:ext cx="2189681" cy="459106"/>
           </a:xfrm>
           <a:prstGeom prst="rect">
             <a:avLst/>
@@ -7824,7 +7823,7 @@
               </a:lnSpc>
             </a:pPr>
             <a:r>
-              <a:rPr sz="1100" b="0" i="0">
+              <a:rPr sz="850" b="0" i="0">
                 <a:solidFill>
                   <a:srgbClr val="16283F"/>
                 </a:solidFill>
@@ -7845,8 +7844,8 @@
         </p:nvSpPr>
         <p:spPr>
           <a:xfrm>
-            <a:off x="6187440" y="2176785"/>
-            <a:ext cx="5492494" cy="914402"/>
+            <a:off x="3085795" y="1828804"/>
+            <a:ext cx="2445714" cy="841250"/>
           </a:xfrm>
           <a:prstGeom prst="roundRect">
             <a:avLst>
@@ -7891,8 +7890,8 @@
         </p:nvSpPr>
         <p:spPr>
           <a:xfrm>
-            <a:off x="6370320" y="2286513"/>
-            <a:ext cx="5126733" cy="190500"/>
+            <a:off x="3213812" y="1920244"/>
+            <a:ext cx="2189681" cy="162687"/>
           </a:xfrm>
           <a:prstGeom prst="rect">
             <a:avLst/>
@@ -7907,11 +7906,11 @@
           <a:p>
             <a:pPr algn="l">
               <a:lnSpc>
-                <a:spcPct val="120000"/>
+                <a:spcPct val="122000"/>
               </a:lnSpc>
             </a:pPr>
             <a:r>
-              <a:rPr sz="1250" b="1" i="0">
+              <a:rPr sz="1050" b="1" i="0">
                 <a:solidFill>
                   <a:srgbClr val="003669"/>
                 </a:solidFill>
@@ -7932,8 +7931,8 @@
         </p:nvSpPr>
         <p:spPr>
           <a:xfrm>
-            <a:off x="6370320" y="2531878"/>
-            <a:ext cx="5126733" cy="449581"/>
+            <a:off x="3213812" y="2119508"/>
+            <a:ext cx="2189681" cy="459106"/>
           </a:xfrm>
           <a:prstGeom prst="rect">
             <a:avLst/>
@@ -7952,7 +7951,7 @@
               </a:lnSpc>
             </a:pPr>
             <a:r>
-              <a:rPr sz="1100" b="0" i="0">
+              <a:rPr sz="850" b="0" i="0">
                 <a:solidFill>
                   <a:srgbClr val="16283F"/>
                 </a:solidFill>
@@ -7973,8 +7972,8 @@
         </p:nvSpPr>
         <p:spPr>
           <a:xfrm>
-            <a:off x="512065" y="3219204"/>
-            <a:ext cx="50292" cy="201168"/>
+            <a:off x="512065" y="2779782"/>
+            <a:ext cx="50292" cy="182880"/>
           </a:xfrm>
           <a:prstGeom prst="rect">
             <a:avLst/>
@@ -8017,8 +8016,8 @@
         </p:nvSpPr>
         <p:spPr>
           <a:xfrm>
-            <a:off x="658369" y="3200916"/>
-            <a:ext cx="11021565" cy="237744"/>
+            <a:off x="658369" y="2761494"/>
+            <a:ext cx="4873140" cy="219456"/>
           </a:xfrm>
           <a:prstGeom prst="rect">
             <a:avLst/>
@@ -8037,7 +8036,7 @@
               </a:lnSpc>
             </a:pPr>
             <a:r>
-              <a:rPr sz="1400" b="1" i="0">
+              <a:rPr sz="1300" b="1" i="0">
                 <a:solidFill>
                   <a:srgbClr val="003669"/>
                 </a:solidFill>
@@ -8050,22 +8049,59 @@
           </a:p>
         </p:txBody>
       </p:sp>
-      <p:sp>
-        <p:nvSpPr>
-          <p:cNvPr id="14" name="Chevron 13"/>
+      <p:cxnSp>
+        <p:nvCxnSpPr>
+          <p:cNvPr id="14" name="Connector 13"/>
+          <p:cNvCxnSpPr/>
+          <p:nvPr/>
+        </p:nvCxnSpPr>
+        <p:spPr>
+          <a:xfrm>
+            <a:off x="804674" y="3108967"/>
+            <a:ext cx="0" cy="1426468"/>
+          </a:xfrm>
+          <a:prstGeom prst="line">
+            <a:avLst/>
+          </a:prstGeom>
+          <a:ln w="15240">
+            <a:solidFill>
+              <a:srgbClr val="C6D5E6"/>
+            </a:solidFill>
+          </a:ln>
+        </p:spPr>
+        <p:style>
+          <a:lnRef idx="2">
+            <a:schemeClr val="accent1"/>
+          </a:lnRef>
+          <a:fillRef idx="0">
+            <a:schemeClr val="accent1"/>
+          </a:fillRef>
+          <a:effectRef idx="1">
+            <a:schemeClr val="accent1"/>
+          </a:effectRef>
+          <a:fontRef idx="minor">
+            <a:schemeClr val="tx1"/>
+          </a:fontRef>
+        </p:style>
+      </p:cxnSp>
+      <p:sp>
+        <p:nvSpPr>
+          <p:cNvPr id="15" name="Rounded Rectangle 14"/>
           <p:cNvSpPr/>
           <p:nvPr/>
         </p:nvSpPr>
         <p:spPr>
           <a:xfrm>
-            <a:off x="512065" y="3493524"/>
-            <a:ext cx="2145791" cy="329184"/>
-          </a:xfrm>
-          <a:prstGeom prst="chevron">
-            <a:avLst/>
+            <a:off x="745237" y="3104395"/>
+            <a:ext cx="118872" cy="118872"/>
+          </a:xfrm>
+          <a:prstGeom prst="roundRect">
+            <a:avLst>
+              <a:gd name="adj" fmla="val 50000"/>
+            </a:avLst>
           </a:prstGeom>
           <a:solidFill>
-            <a:srgbClr val="DDE7F3"/>
+            <a:srgbClr val="003669"/>
           </a:solidFill>
           <a:ln>
             <a:noFill/>
@@ -8096,14 +8132,14 @@
       </p:sp>
       <p:sp>
         <p:nvSpPr>
-          <p:cNvPr id="15" name="TextBox 14"/>
+          <p:cNvPr id="16" name="TextBox 15"/>
           <p:cNvSpPr txBox="1"/>
           <p:nvPr/>
         </p:nvSpPr>
         <p:spPr>
           <a:xfrm>
-            <a:off x="585217" y="3493524"/>
-            <a:ext cx="1962910" cy="329184"/>
+            <a:off x="512065" y="3063247"/>
+            <a:ext cx="256032" cy="201168"/>
           </a:xfrm>
           <a:prstGeom prst="rect">
             <a:avLst/>
@@ -8116,35 +8152,35 @@
           </a:bodyPr>
           <a:lstStyle/>
           <a:p>
-            <a:pPr algn="ctr">
+            <a:pPr algn="r">
               <a:lnSpc>
                 <a:spcPct val="128000"/>
               </a:lnSpc>
             </a:pPr>
             <a:r>
-              <a:rPr sz="1050" b="1" i="0">
-                <a:solidFill>
-                  <a:srgbClr val="16283F"/>
+              <a:rPr sz="950" b="1" i="0">
+                <a:solidFill>
+                  <a:srgbClr val="8A5D06"/>
                 </a:solidFill>
                 <a:latin typeface="Arial"/>
                 <a:ea typeface="微软雅黑"/>
                 <a:cs typeface="Arial"/>
               </a:rPr>
-              <a:t>2 月 - 系统功能开发</a:t>
-            </a:r>
-          </a:p>
-        </p:txBody>
-      </p:sp>
-      <p:sp>
-        <p:nvSpPr>
-          <p:cNvPr id="16" name="TextBox 15"/>
+              <a:t>2 月</a:t>
+            </a:r>
+          </a:p>
+        </p:txBody>
+      </p:sp>
+      <p:sp>
+        <p:nvSpPr>
+          <p:cNvPr id="17" name="TextBox 16"/>
           <p:cNvSpPr txBox="1"/>
           <p:nvPr/>
         </p:nvSpPr>
         <p:spPr>
           <a:xfrm>
-            <a:off x="566929" y="3895861"/>
-            <a:ext cx="2036062" cy="859538"/>
+            <a:off x="950978" y="3058675"/>
+            <a:ext cx="1097282" cy="201168"/>
           </a:xfrm>
           <a:prstGeom prst="rect">
             <a:avLst/>
@@ -8152,36 +8188,59 @@
           <a:noFill/>
         </p:spPr>
         <p:txBody>
-          <a:bodyPr wrap="square" lIns="0" rIns="0" tIns="0" bIns="0" anchor="t">
+          <a:bodyPr wrap="square" lIns="0" rIns="0" tIns="0" bIns="0" anchor="ctr">
             <a:spAutoFit/>
           </a:bodyPr>
           <a:lstStyle/>
           <a:p>
             <a:pPr algn="l">
               <a:lnSpc>
-                <a:spcPct val="130000"/>
+                <a:spcPct val="128000"/>
               </a:lnSpc>
             </a:pPr>
             <a:r>
-              <a:rPr sz="1000" b="0" i="0">
-                <a:solidFill>
-                  <a:srgbClr val="4E6584"/>
+              <a:rPr sz="1050" b="1" i="0">
+                <a:solidFill>
+                  <a:srgbClr val="003669"/>
                 </a:solidFill>
                 <a:latin typeface="Arial"/>
                 <a:ea typeface="微软雅黑"/>
                 <a:cs typeface="Arial"/>
               </a:rPr>
-              <a:t>1、EIMS 系统功能开发；</a:t>
-            </a:r>
-          </a:p>
+              <a:t>系统功能开发</a:t>
+            </a:r>
+          </a:p>
+        </p:txBody>
+      </p:sp>
+      <p:sp>
+        <p:nvSpPr>
+          <p:cNvPr id="18" name="TextBox 17"/>
+          <p:cNvSpPr txBox="1"/>
+          <p:nvPr/>
+        </p:nvSpPr>
+        <p:spPr>
+          <a:xfrm>
+            <a:off x="2084837" y="3035815"/>
+            <a:ext cx="3446672" cy="256032"/>
+          </a:xfrm>
+          <a:prstGeom prst="rect">
+            <a:avLst/>
+          </a:prstGeom>
+          <a:noFill/>
+        </p:spPr>
+        <p:txBody>
+          <a:bodyPr wrap="square" lIns="0" rIns="0" tIns="0" bIns="0" anchor="ctr">
+            <a:spAutoFit/>
+          </a:bodyPr>
+          <a:lstStyle/>
           <a:p>
             <a:pPr algn="l">
               <a:lnSpc>
-                <a:spcPct val="130000"/>
+                <a:spcPct val="128000"/>
               </a:lnSpc>
             </a:pPr>
             <a:r>
-              <a:rPr sz="1000" b="0" i="0">
+              <a:rPr sz="850" b="0" i="0">
                 <a:solidFill>
                   <a:srgbClr val="4E6584"/>
                 </a:solidFill>
@@ -8189,27 +8248,29 @@
                 <a:ea typeface="微软雅黑"/>
                 <a:cs typeface="Arial"/>
               </a:rPr>
-              <a:t>2、完成变更控制文件与 URS 签批；</a:t>
-            </a:r>
-          </a:p>
-        </p:txBody>
-      </p:sp>
-      <p:sp>
-        <p:nvSpPr>
-          <p:cNvPr id="17" name="Chevron 16"/>
+              <a:t>1、EIMS 系统功能开发；2、完成变更控制文件与 URS 签批；</a:t>
+            </a:r>
+          </a:p>
+        </p:txBody>
+      </p:sp>
+      <p:sp>
+        <p:nvSpPr>
+          <p:cNvPr id="19" name="Rounded Rectangle 18"/>
           <p:cNvSpPr/>
           <p:nvPr/>
         </p:nvSpPr>
         <p:spPr>
           <a:xfrm>
-            <a:off x="2767584" y="3493524"/>
-            <a:ext cx="2145791" cy="329184"/>
-          </a:xfrm>
-          <a:prstGeom prst="chevron">
-            <a:avLst/>
+            <a:off x="745237" y="3433580"/>
+            <a:ext cx="118872" cy="118872"/>
+          </a:xfrm>
+          <a:prstGeom prst="roundRect">
+            <a:avLst>
+              <a:gd name="adj" fmla="val 50000"/>
+            </a:avLst>
           </a:prstGeom>
           <a:solidFill>
-            <a:srgbClr val="DDE7F3"/>
+            <a:srgbClr val="003669"/>
           </a:solidFill>
           <a:ln>
             <a:noFill/>
@@ -8240,14 +8301,14 @@
       </p:sp>
       <p:sp>
         <p:nvSpPr>
-          <p:cNvPr id="18" name="TextBox 17"/>
+          <p:cNvPr id="20" name="TextBox 19"/>
           <p:cNvSpPr txBox="1"/>
           <p:nvPr/>
         </p:nvSpPr>
         <p:spPr>
           <a:xfrm>
-            <a:off x="2840737" y="3493524"/>
-            <a:ext cx="1962910" cy="329184"/>
+            <a:off x="512065" y="3392432"/>
+            <a:ext cx="256032" cy="201168"/>
           </a:xfrm>
           <a:prstGeom prst="rect">
             <a:avLst/>
@@ -8260,35 +8321,35 @@
           </a:bodyPr>
           <a:lstStyle/>
           <a:p>
-            <a:pPr algn="ctr">
+            <a:pPr algn="r">
               <a:lnSpc>
                 <a:spcPct val="128000"/>
               </a:lnSpc>
             </a:pPr>
             <a:r>
-              <a:rPr sz="1050" b="1" i="0">
-                <a:solidFill>
-                  <a:srgbClr val="16283F"/>
+              <a:rPr sz="950" b="1" i="0">
+                <a:solidFill>
+                  <a:srgbClr val="8A5D06"/>
                 </a:solidFill>
                 <a:latin typeface="Arial"/>
                 <a:ea typeface="微软雅黑"/>
                 <a:cs typeface="Arial"/>
               </a:rPr>
-              <a:t>3 月 - UAT 用户测试</a:t>
-            </a:r>
-          </a:p>
-        </p:txBody>
-      </p:sp>
-      <p:sp>
-        <p:nvSpPr>
-          <p:cNvPr id="19" name="TextBox 18"/>
+              <a:t>3 月</a:t>
+            </a:r>
+          </a:p>
+        </p:txBody>
+      </p:sp>
+      <p:sp>
+        <p:nvSpPr>
+          <p:cNvPr id="21" name="TextBox 20"/>
           <p:cNvSpPr txBox="1"/>
           <p:nvPr/>
         </p:nvSpPr>
         <p:spPr>
           <a:xfrm>
-            <a:off x="2822448" y="3895861"/>
-            <a:ext cx="2036062" cy="859538"/>
+            <a:off x="950978" y="3387860"/>
+            <a:ext cx="1097282" cy="201168"/>
           </a:xfrm>
           <a:prstGeom prst="rect">
             <a:avLst/>
@@ -8296,36 +8357,59 @@
           <a:noFill/>
         </p:spPr>
         <p:txBody>
-          <a:bodyPr wrap="square" lIns="0" rIns="0" tIns="0" bIns="0" anchor="t">
+          <a:bodyPr wrap="square" lIns="0" rIns="0" tIns="0" bIns="0" anchor="ctr">
             <a:spAutoFit/>
           </a:bodyPr>
           <a:lstStyle/>
           <a:p>
             <a:pPr algn="l">
               <a:lnSpc>
-                <a:spcPct val="130000"/>
+                <a:spcPct val="128000"/>
               </a:lnSpc>
             </a:pPr>
             <a:r>
-              <a:rPr sz="1000" b="0" i="0">
-                <a:solidFill>
-                  <a:srgbClr val="4E6584"/>
+              <a:rPr sz="1050" b="1" i="0">
+                <a:solidFill>
+                  <a:srgbClr val="003669"/>
                 </a:solidFill>
                 <a:latin typeface="Arial"/>
                 <a:ea typeface="微软雅黑"/>
                 <a:cs typeface="Arial"/>
               </a:rPr>
-              <a:t>1、EIMS 系统环境测试；</a:t>
-            </a:r>
-          </a:p>
+              <a:t>UAT 用户测试</a:t>
+            </a:r>
+          </a:p>
+        </p:txBody>
+      </p:sp>
+      <p:sp>
+        <p:nvSpPr>
+          <p:cNvPr id="22" name="TextBox 21"/>
+          <p:cNvSpPr txBox="1"/>
+          <p:nvPr/>
+        </p:nvSpPr>
+        <p:spPr>
+          <a:xfrm>
+            <a:off x="2084837" y="3365000"/>
+            <a:ext cx="3446672" cy="256032"/>
+          </a:xfrm>
+          <a:prstGeom prst="rect">
+            <a:avLst/>
+          </a:prstGeom>
+          <a:noFill/>
+        </p:spPr>
+        <p:txBody>
+          <a:bodyPr wrap="square" lIns="0" rIns="0" tIns="0" bIns="0" anchor="ctr">
+            <a:spAutoFit/>
+          </a:bodyPr>
+          <a:lstStyle/>
           <a:p>
             <a:pPr algn="l">
               <a:lnSpc>
-                <a:spcPct val="130000"/>
+                <a:spcPct val="128000"/>
               </a:lnSpc>
             </a:pPr>
             <a:r>
-              <a:rPr sz="1000" b="0" i="0">
+              <a:rPr sz="800" b="0" i="0">
                 <a:solidFill>
                   <a:srgbClr val="4E6584"/>
                 </a:solidFill>
@@ -8333,27 +8417,29 @@
                 <a:ea typeface="微软雅黑"/>
                 <a:cs typeface="Arial"/>
               </a:rPr>
-              <a:t>2、UAT 及 VP、RAR、FS 签批，UAT 用户测试；</a:t>
-            </a:r>
-          </a:p>
-        </p:txBody>
-      </p:sp>
-      <p:sp>
-        <p:nvSpPr>
-          <p:cNvPr id="20" name="Chevron 19"/>
+              <a:t>1、EIMS 系统环境测试；2、UAT 及 VP、RAR、FS 签批，UAT 用户测试；</a:t>
+            </a:r>
+          </a:p>
+        </p:txBody>
+      </p:sp>
+      <p:sp>
+        <p:nvSpPr>
+          <p:cNvPr id="23" name="Rounded Rectangle 22"/>
           <p:cNvSpPr/>
           <p:nvPr/>
         </p:nvSpPr>
         <p:spPr>
           <a:xfrm>
-            <a:off x="5023104" y="3493524"/>
-            <a:ext cx="2145791" cy="329184"/>
-          </a:xfrm>
-          <a:prstGeom prst="chevron">
-            <a:avLst/>
+            <a:off x="745237" y="3762765"/>
+            <a:ext cx="118872" cy="118872"/>
+          </a:xfrm>
+          <a:prstGeom prst="roundRect">
+            <a:avLst>
+              <a:gd name="adj" fmla="val 50000"/>
+            </a:avLst>
           </a:prstGeom>
           <a:solidFill>
-            <a:srgbClr val="DDE7F3"/>
+            <a:srgbClr val="003669"/>
           </a:solidFill>
           <a:ln>
             <a:noFill/>
@@ -8384,14 +8470,14 @@
       </p:sp>
       <p:sp>
         <p:nvSpPr>
-          <p:cNvPr id="21" name="TextBox 20"/>
+          <p:cNvPr id="24" name="TextBox 23"/>
           <p:cNvSpPr txBox="1"/>
           <p:nvPr/>
         </p:nvSpPr>
         <p:spPr>
           <a:xfrm>
-            <a:off x="5096256" y="3493524"/>
-            <a:ext cx="1962910" cy="329184"/>
+            <a:off x="512065" y="3721617"/>
+            <a:ext cx="256032" cy="201168"/>
           </a:xfrm>
           <a:prstGeom prst="rect">
             <a:avLst/>
@@ -8404,35 +8490,35 @@
           </a:bodyPr>
           <a:lstStyle/>
           <a:p>
-            <a:pPr algn="ctr">
+            <a:pPr algn="r">
               <a:lnSpc>
                 <a:spcPct val="128000"/>
               </a:lnSpc>
             </a:pPr>
             <a:r>
-              <a:rPr sz="1050" b="1" i="0">
-                <a:solidFill>
-                  <a:srgbClr val="16283F"/>
+              <a:rPr sz="950" b="1" i="0">
+                <a:solidFill>
+                  <a:srgbClr val="8A5D06"/>
                 </a:solidFill>
                 <a:latin typeface="Arial"/>
                 <a:ea typeface="微软雅黑"/>
                 <a:cs typeface="Arial"/>
               </a:rPr>
-              <a:t>4 月 - 文件撰写审批</a:t>
-            </a:r>
-          </a:p>
-        </p:txBody>
-      </p:sp>
-      <p:sp>
-        <p:nvSpPr>
-          <p:cNvPr id="22" name="TextBox 21"/>
+              <a:t>4 月</a:t>
+            </a:r>
+          </a:p>
+        </p:txBody>
+      </p:sp>
+      <p:sp>
+        <p:nvSpPr>
+          <p:cNvPr id="25" name="TextBox 24"/>
           <p:cNvSpPr txBox="1"/>
           <p:nvPr/>
         </p:nvSpPr>
         <p:spPr>
           <a:xfrm>
-            <a:off x="5077968" y="3895861"/>
-            <a:ext cx="2036062" cy="859538"/>
+            <a:off x="950978" y="3717045"/>
+            <a:ext cx="1097282" cy="201168"/>
           </a:xfrm>
           <a:prstGeom prst="rect">
             <a:avLst/>
@@ -8440,18 +8526,59 @@
           <a:noFill/>
         </p:spPr>
         <p:txBody>
-          <a:bodyPr wrap="square" lIns="0" rIns="0" tIns="0" bIns="0" anchor="t">
+          <a:bodyPr wrap="square" lIns="0" rIns="0" tIns="0" bIns="0" anchor="ctr">
             <a:spAutoFit/>
           </a:bodyPr>
           <a:lstStyle/>
           <a:p>
             <a:pPr algn="l">
               <a:lnSpc>
-                <a:spcPct val="130000"/>
+                <a:spcPct val="128000"/>
               </a:lnSpc>
             </a:pPr>
             <a:r>
-              <a:rPr sz="1000" b="0" i="0">
+              <a:rPr sz="1050" b="1" i="0">
+                <a:solidFill>
+                  <a:srgbClr val="003669"/>
+                </a:solidFill>
+                <a:latin typeface="Arial"/>
+                <a:ea typeface="微软雅黑"/>
+                <a:cs typeface="Arial"/>
+              </a:rPr>
+              <a:t>文件撰写审批</a:t>
+            </a:r>
+          </a:p>
+        </p:txBody>
+      </p:sp>
+      <p:sp>
+        <p:nvSpPr>
+          <p:cNvPr id="26" name="TextBox 25"/>
+          <p:cNvSpPr txBox="1"/>
+          <p:nvPr/>
+        </p:nvSpPr>
+        <p:spPr>
+          <a:xfrm>
+            <a:off x="2084837" y="3694185"/>
+            <a:ext cx="3446672" cy="256032"/>
+          </a:xfrm>
+          <a:prstGeom prst="rect">
+            <a:avLst/>
+          </a:prstGeom>
+          <a:noFill/>
+        </p:spPr>
+        <p:txBody>
+          <a:bodyPr wrap="square" lIns="0" rIns="0" tIns="0" bIns="0" anchor="ctr">
+            <a:spAutoFit/>
+          </a:bodyPr>
+          <a:lstStyle/>
+          <a:p>
+            <a:pPr algn="l">
+              <a:lnSpc>
+                <a:spcPct val="128000"/>
+              </a:lnSpc>
+            </a:pPr>
+            <a:r>
+              <a:rPr sz="850" b="0" i="0">
                 <a:solidFill>
                   <a:srgbClr val="4E6584"/>
                 </a:solidFill>
@@ -8466,20 +8593,22 @@
       </p:sp>
       <p:sp>
         <p:nvSpPr>
-          <p:cNvPr id="23" name="Chevron 22"/>
+          <p:cNvPr id="27" name="Rounded Rectangle 26"/>
           <p:cNvSpPr/>
           <p:nvPr/>
         </p:nvSpPr>
         <p:spPr>
           <a:xfrm>
-            <a:off x="7278623" y="3493524"/>
-            <a:ext cx="2145791" cy="329184"/>
-          </a:xfrm>
-          <a:prstGeom prst="chevron">
-            <a:avLst/>
+            <a:off x="745237" y="4091950"/>
+            <a:ext cx="118872" cy="118872"/>
+          </a:xfrm>
+          <a:prstGeom prst="roundRect">
+            <a:avLst>
+              <a:gd name="adj" fmla="val 50000"/>
+            </a:avLst>
           </a:prstGeom>
           <a:solidFill>
-            <a:srgbClr val="DDE7F3"/>
+            <a:srgbClr val="003669"/>
           </a:solidFill>
           <a:ln>
             <a:noFill/>
@@ -8510,14 +8639,14 @@
       </p:sp>
       <p:sp>
         <p:nvSpPr>
-          <p:cNvPr id="24" name="TextBox 23"/>
+          <p:cNvPr id="28" name="TextBox 27"/>
           <p:cNvSpPr txBox="1"/>
           <p:nvPr/>
         </p:nvSpPr>
         <p:spPr>
           <a:xfrm>
-            <a:off x="7351776" y="3493524"/>
-            <a:ext cx="1962910" cy="329184"/>
+            <a:off x="512065" y="4050802"/>
+            <a:ext cx="256032" cy="201168"/>
           </a:xfrm>
           <a:prstGeom prst="rect">
             <a:avLst/>
@@ -8530,35 +8659,35 @@
           </a:bodyPr>
           <a:lstStyle/>
           <a:p>
-            <a:pPr algn="ctr">
+            <a:pPr algn="r">
               <a:lnSpc>
                 <a:spcPct val="128000"/>
               </a:lnSpc>
             </a:pPr>
             <a:r>
-              <a:rPr sz="1050" b="1" i="0">
-                <a:solidFill>
-                  <a:srgbClr val="16283F"/>
+              <a:rPr sz="950" b="1" i="0">
+                <a:solidFill>
+                  <a:srgbClr val="8A5D06"/>
                 </a:solidFill>
                 <a:latin typeface="Arial"/>
                 <a:ea typeface="微软雅黑"/>
                 <a:cs typeface="Arial"/>
               </a:rPr>
-              <a:t>5 月 - 系统验证执行</a:t>
-            </a:r>
-          </a:p>
-        </p:txBody>
-      </p:sp>
-      <p:sp>
-        <p:nvSpPr>
-          <p:cNvPr id="25" name="TextBox 24"/>
+              <a:t>5 月</a:t>
+            </a:r>
+          </a:p>
+        </p:txBody>
+      </p:sp>
+      <p:sp>
+        <p:nvSpPr>
+          <p:cNvPr id="29" name="TextBox 28"/>
           <p:cNvSpPr txBox="1"/>
           <p:nvPr/>
         </p:nvSpPr>
         <p:spPr>
           <a:xfrm>
-            <a:off x="7333488" y="3895861"/>
-            <a:ext cx="2036062" cy="859538"/>
+            <a:off x="950978" y="4046230"/>
+            <a:ext cx="1097282" cy="201168"/>
           </a:xfrm>
           <a:prstGeom prst="rect">
             <a:avLst/>
@@ -8566,18 +8695,59 @@
           <a:noFill/>
         </p:spPr>
         <p:txBody>
-          <a:bodyPr wrap="square" lIns="0" rIns="0" tIns="0" bIns="0" anchor="t">
+          <a:bodyPr wrap="square" lIns="0" rIns="0" tIns="0" bIns="0" anchor="ctr">
             <a:spAutoFit/>
           </a:bodyPr>
           <a:lstStyle/>
           <a:p>
             <a:pPr algn="l">
               <a:lnSpc>
-                <a:spcPct val="130000"/>
+                <a:spcPct val="128000"/>
               </a:lnSpc>
             </a:pPr>
             <a:r>
-              <a:rPr sz="1000" b="0" i="0">
+              <a:rPr sz="1050" b="1" i="0">
+                <a:solidFill>
+                  <a:srgbClr val="003669"/>
+                </a:solidFill>
+                <a:latin typeface="Arial"/>
+                <a:ea typeface="微软雅黑"/>
+                <a:cs typeface="Arial"/>
+              </a:rPr>
+              <a:t>系统验证执行</a:t>
+            </a:r>
+          </a:p>
+        </p:txBody>
+      </p:sp>
+      <p:sp>
+        <p:nvSpPr>
+          <p:cNvPr id="30" name="TextBox 29"/>
+          <p:cNvSpPr txBox="1"/>
+          <p:nvPr/>
+        </p:nvSpPr>
+        <p:spPr>
+          <a:xfrm>
+            <a:off x="2084837" y="4023370"/>
+            <a:ext cx="3446672" cy="256032"/>
+          </a:xfrm>
+          <a:prstGeom prst="rect">
+            <a:avLst/>
+          </a:prstGeom>
+          <a:noFill/>
+        </p:spPr>
+        <p:txBody>
+          <a:bodyPr wrap="square" lIns="0" rIns="0" tIns="0" bIns="0" anchor="ctr">
+            <a:spAutoFit/>
+          </a:bodyPr>
+          <a:lstStyle/>
+          <a:p>
+            <a:pPr algn="l">
+              <a:lnSpc>
+                <a:spcPct val="128000"/>
+              </a:lnSpc>
+            </a:pPr>
+            <a:r>
+              <a:rPr sz="850" b="0" i="0">
                 <a:solidFill>
                   <a:srgbClr val="4E6584"/>
                 </a:solidFill>
@@ -8592,20 +8762,22 @@
       </p:sp>
       <p:sp>
         <p:nvSpPr>
-          <p:cNvPr id="26" name="Chevron 25"/>
+          <p:cNvPr id="31" name="Rounded Rectangle 30"/>
           <p:cNvSpPr/>
           <p:nvPr/>
         </p:nvSpPr>
         <p:spPr>
           <a:xfrm>
-            <a:off x="9534143" y="3493524"/>
-            <a:ext cx="2145791" cy="329184"/>
-          </a:xfrm>
-          <a:prstGeom prst="chevron">
-            <a:avLst/>
+            <a:off x="745237" y="4421135"/>
+            <a:ext cx="118872" cy="118872"/>
+          </a:xfrm>
+          <a:prstGeom prst="roundRect">
+            <a:avLst>
+              <a:gd name="adj" fmla="val 50000"/>
+            </a:avLst>
           </a:prstGeom>
           <a:solidFill>
-            <a:srgbClr val="DDE7F3"/>
+            <a:srgbClr val="003669"/>
           </a:solidFill>
           <a:ln>
             <a:noFill/>
@@ -8636,14 +8808,14 @@
       </p:sp>
       <p:sp>
         <p:nvSpPr>
-          <p:cNvPr id="27" name="TextBox 26"/>
+          <p:cNvPr id="32" name="TextBox 31"/>
           <p:cNvSpPr txBox="1"/>
           <p:nvPr/>
         </p:nvSpPr>
         <p:spPr>
           <a:xfrm>
-            <a:off x="9607295" y="3493524"/>
-            <a:ext cx="1962910" cy="329184"/>
+            <a:off x="512065" y="4379986"/>
+            <a:ext cx="256032" cy="201168"/>
           </a:xfrm>
           <a:prstGeom prst="rect">
             <a:avLst/>
@@ -8656,35 +8828,35 @@
           </a:bodyPr>
           <a:lstStyle/>
           <a:p>
-            <a:pPr algn="ctr">
+            <a:pPr algn="r">
               <a:lnSpc>
                 <a:spcPct val="128000"/>
               </a:lnSpc>
             </a:pPr>
             <a:r>
-              <a:rPr sz="1050" b="1" i="0">
-                <a:solidFill>
-                  <a:srgbClr val="16283F"/>
+              <a:rPr sz="950" b="1" i="0">
+                <a:solidFill>
+                  <a:srgbClr val="8A5D06"/>
                 </a:solidFill>
                 <a:latin typeface="Arial"/>
                 <a:ea typeface="微软雅黑"/>
                 <a:cs typeface="Arial"/>
               </a:rPr>
-              <a:t>6 月 - 系统放行与培训</a:t>
-            </a:r>
-          </a:p>
-        </p:txBody>
-      </p:sp>
-      <p:sp>
-        <p:nvSpPr>
-          <p:cNvPr id="28" name="TextBox 27"/>
+              <a:t>6 月</a:t>
+            </a:r>
+          </a:p>
+        </p:txBody>
+      </p:sp>
+      <p:sp>
+        <p:nvSpPr>
+          <p:cNvPr id="33" name="TextBox 32"/>
           <p:cNvSpPr txBox="1"/>
           <p:nvPr/>
         </p:nvSpPr>
         <p:spPr>
           <a:xfrm>
-            <a:off x="9589007" y="3895861"/>
-            <a:ext cx="2036062" cy="859538"/>
+            <a:off x="950978" y="4375414"/>
+            <a:ext cx="1097282" cy="201168"/>
           </a:xfrm>
           <a:prstGeom prst="rect">
             <a:avLst/>
@@ -8692,36 +8864,59 @@
           <a:noFill/>
         </p:spPr>
         <p:txBody>
-          <a:bodyPr wrap="square" lIns="0" rIns="0" tIns="0" bIns="0" anchor="t">
+          <a:bodyPr wrap="square" lIns="0" rIns="0" tIns="0" bIns="0" anchor="ctr">
             <a:spAutoFit/>
           </a:bodyPr>
           <a:lstStyle/>
           <a:p>
             <a:pPr algn="l">
               <a:lnSpc>
-                <a:spcPct val="130000"/>
+                <a:spcPct val="128000"/>
               </a:lnSpc>
             </a:pPr>
             <a:r>
-              <a:rPr sz="1000" b="0" i="0">
-                <a:solidFill>
-                  <a:srgbClr val="4E6584"/>
+              <a:rPr sz="1050" b="1" i="0">
+                <a:solidFill>
+                  <a:srgbClr val="003669"/>
                 </a:solidFill>
                 <a:latin typeface="Arial"/>
                 <a:ea typeface="微软雅黑"/>
                 <a:cs typeface="Arial"/>
               </a:rPr>
-              <a:t>1、EIMS 系统 SOP 生效培训；</a:t>
-            </a:r>
-          </a:p>
+              <a:t>系统放行与培训</a:t>
+            </a:r>
+          </a:p>
+        </p:txBody>
+      </p:sp>
+      <p:sp>
+        <p:nvSpPr>
+          <p:cNvPr id="34" name="TextBox 33"/>
+          <p:cNvSpPr txBox="1"/>
+          <p:nvPr/>
+        </p:nvSpPr>
+        <p:spPr>
+          <a:xfrm>
+            <a:off x="2084837" y="4352554"/>
+            <a:ext cx="3446672" cy="256032"/>
+          </a:xfrm>
+          <a:prstGeom prst="rect">
+            <a:avLst/>
+          </a:prstGeom>
+          <a:noFill/>
+        </p:spPr>
+        <p:txBody>
+          <a:bodyPr wrap="square" lIns="0" rIns="0" tIns="0" bIns="0" anchor="ctr">
+            <a:spAutoFit/>
+          </a:bodyPr>
+          <a:lstStyle/>
           <a:p>
             <a:pPr algn="l">
               <a:lnSpc>
-                <a:spcPct val="130000"/>
+                <a:spcPct val="128000"/>
               </a:lnSpc>
             </a:pPr>
             <a:r>
-              <a:rPr sz="1000" b="0" i="0">
+              <a:rPr sz="850" b="0" i="0">
                 <a:solidFill>
                   <a:srgbClr val="4E6584"/>
                 </a:solidFill>
@@ -8729,21 +8924,21 @@
                 <a:ea typeface="微软雅黑"/>
                 <a:cs typeface="Arial"/>
               </a:rPr>
-              <a:t>2、EIMS 系统验证后放行；</a:t>
-            </a:r>
-          </a:p>
-        </p:txBody>
-      </p:sp>
-      <p:sp>
-        <p:nvSpPr>
-          <p:cNvPr id="29" name="Rectangle 28"/>
+              <a:t>1、EIMS 系统 SOP 生效培训；2、EIMS 系统验证后放行；</a:t>
+            </a:r>
+          </a:p>
+        </p:txBody>
+      </p:sp>
+      <p:sp>
+        <p:nvSpPr>
+          <p:cNvPr id="35" name="Rectangle 34"/>
           <p:cNvSpPr/>
           <p:nvPr/>
         </p:nvSpPr>
         <p:spPr>
           <a:xfrm>
-            <a:off x="512065" y="4901704"/>
-            <a:ext cx="50292" cy="201168"/>
+            <a:off x="512065" y="4809756"/>
+            <a:ext cx="50292" cy="182880"/>
           </a:xfrm>
           <a:prstGeom prst="rect">
             <a:avLst/>
@@ -8780,14 +8975,14 @@
       </p:sp>
       <p:sp>
         <p:nvSpPr>
-          <p:cNvPr id="30" name="TextBox 29"/>
+          <p:cNvPr id="36" name="TextBox 35"/>
           <p:cNvSpPr txBox="1"/>
           <p:nvPr/>
         </p:nvSpPr>
         <p:spPr>
           <a:xfrm>
-            <a:off x="658369" y="4883416"/>
-            <a:ext cx="11021565" cy="237744"/>
+            <a:off x="658369" y="4791467"/>
+            <a:ext cx="4873140" cy="219456"/>
           </a:xfrm>
           <a:prstGeom prst="rect">
             <a:avLst/>
@@ -8806,7 +9001,7 @@
               </a:lnSpc>
             </a:pPr>
             <a:r>
-              <a:rPr sz="1400" b="1" i="0">
+              <a:rPr sz="1300" b="1" i="0">
                 <a:solidFill>
                   <a:srgbClr val="003669"/>
                 </a:solidFill>
@@ -8821,14 +9016,14 @@
       </p:sp>
       <p:sp>
         <p:nvSpPr>
-          <p:cNvPr id="31" name="Rounded Rectangle 30"/>
+          <p:cNvPr id="37" name="Rounded Rectangle 36"/>
           <p:cNvSpPr/>
           <p:nvPr/>
         </p:nvSpPr>
         <p:spPr>
           <a:xfrm>
-            <a:off x="512065" y="5176024"/>
-            <a:ext cx="3625086" cy="1005334"/>
+            <a:off x="512065" y="5047500"/>
+            <a:ext cx="5019444" cy="332232"/>
           </a:xfrm>
           <a:prstGeom prst="roundRect">
             <a:avLst>
@@ -8867,14 +9062,14 @@
       </p:sp>
       <p:sp>
         <p:nvSpPr>
-          <p:cNvPr id="32" name="TextBox 31"/>
+          <p:cNvPr id="38" name="TextBox 37"/>
           <p:cNvSpPr txBox="1"/>
           <p:nvPr/>
         </p:nvSpPr>
         <p:spPr>
           <a:xfrm>
-            <a:off x="658369" y="5285753"/>
-            <a:ext cx="3332478" cy="384048"/>
+            <a:off x="640081" y="5047500"/>
+            <a:ext cx="1417323" cy="332232"/>
           </a:xfrm>
           <a:prstGeom prst="rect">
             <a:avLst/>
@@ -8882,18 +9077,18 @@
           <a:noFill/>
         </p:spPr>
         <p:txBody>
-          <a:bodyPr wrap="square" lIns="0" rIns="0" tIns="0" bIns="0" anchor="t">
+          <a:bodyPr wrap="square" lIns="0" rIns="0" tIns="0" bIns="0" anchor="ctr">
             <a:spAutoFit/>
           </a:bodyPr>
           <a:lstStyle/>
           <a:p>
             <a:pPr algn="l">
               <a:lnSpc>
-                <a:spcPct val="120000"/>
+                <a:spcPct val="128000"/>
               </a:lnSpc>
             </a:pPr>
             <a:r>
-              <a:rPr sz="1250" b="1" i="0">
+              <a:rPr sz="950" b="1" i="0">
                 <a:solidFill>
                   <a:srgbClr val="003669"/>
                 </a:solidFill>
@@ -8908,14 +9103,14 @@
       </p:sp>
       <p:sp>
         <p:nvSpPr>
-          <p:cNvPr id="33" name="TextBox 32"/>
+          <p:cNvPr id="39" name="TextBox 38"/>
           <p:cNvSpPr txBox="1"/>
           <p:nvPr/>
         </p:nvSpPr>
         <p:spPr>
           <a:xfrm>
-            <a:off x="658369" y="5706378"/>
-            <a:ext cx="3332478" cy="365252"/>
+            <a:off x="2057405" y="5047500"/>
+            <a:ext cx="3346088" cy="332232"/>
           </a:xfrm>
           <a:prstGeom prst="rect">
             <a:avLst/>
@@ -8923,20 +9118,20 @@
           <a:noFill/>
         </p:spPr>
         <p:txBody>
-          <a:bodyPr wrap="square" lIns="0" rIns="0" tIns="0" bIns="0" anchor="t">
+          <a:bodyPr wrap="square" lIns="0" rIns="0" tIns="0" bIns="0" anchor="ctr">
             <a:spAutoFit/>
           </a:bodyPr>
           <a:lstStyle/>
           <a:p>
             <a:pPr algn="l">
               <a:lnSpc>
-                <a:spcPct val="130000"/>
+                <a:spcPct val="124000"/>
               </a:lnSpc>
             </a:pPr>
             <a:r>
-              <a:rPr sz="1000" b="0" i="0">
-                <a:solidFill>
-                  <a:srgbClr val="16283F"/>
+              <a:rPr sz="850" b="0" i="0">
+                <a:solidFill>
+                  <a:srgbClr val="4E6584"/>
                 </a:solidFill>
                 <a:latin typeface="Arial"/>
                 <a:ea typeface="微软雅黑"/>
@@ -8949,14 +9144,14 @@
       </p:sp>
       <p:sp>
         <p:nvSpPr>
-          <p:cNvPr id="34" name="Rounded Rectangle 33"/>
+          <p:cNvPr id="40" name="Rounded Rectangle 39"/>
           <p:cNvSpPr/>
           <p:nvPr/>
         </p:nvSpPr>
         <p:spPr>
           <a:xfrm>
-            <a:off x="4283456" y="5176024"/>
-            <a:ext cx="3625086" cy="1005334"/>
+            <a:off x="512065" y="5425453"/>
+            <a:ext cx="5019444" cy="332232"/>
           </a:xfrm>
           <a:prstGeom prst="roundRect">
             <a:avLst>
@@ -8995,14 +9190,14 @@
       </p:sp>
       <p:sp>
         <p:nvSpPr>
-          <p:cNvPr id="35" name="TextBox 34"/>
+          <p:cNvPr id="41" name="TextBox 40"/>
           <p:cNvSpPr txBox="1"/>
           <p:nvPr/>
         </p:nvSpPr>
         <p:spPr>
           <a:xfrm>
-            <a:off x="4429760" y="5285753"/>
-            <a:ext cx="3332478" cy="384048"/>
+            <a:off x="640081" y="5425453"/>
+            <a:ext cx="1417323" cy="332232"/>
           </a:xfrm>
           <a:prstGeom prst="rect">
             <a:avLst/>
@@ -9010,18 +9205,18 @@
           <a:noFill/>
         </p:spPr>
         <p:txBody>
-          <a:bodyPr wrap="square" lIns="0" rIns="0" tIns="0" bIns="0" anchor="t">
+          <a:bodyPr wrap="square" lIns="0" rIns="0" tIns="0" bIns="0" anchor="ctr">
             <a:spAutoFit/>
           </a:bodyPr>
           <a:lstStyle/>
           <a:p>
             <a:pPr algn="l">
               <a:lnSpc>
-                <a:spcPct val="120000"/>
+                <a:spcPct val="128000"/>
               </a:lnSpc>
             </a:pPr>
             <a:r>
-              <a:rPr sz="1250" b="1" i="0">
+              <a:rPr sz="950" b="1" i="0">
                 <a:solidFill>
                   <a:srgbClr val="003669"/>
                 </a:solidFill>
@@ -9036,14 +9231,14 @@
       </p:sp>
       <p:sp>
         <p:nvSpPr>
-          <p:cNvPr id="36" name="TextBox 35"/>
+          <p:cNvPr id="42" name="TextBox 41"/>
           <p:cNvSpPr txBox="1"/>
           <p:nvPr/>
         </p:nvSpPr>
         <p:spPr>
           <a:xfrm>
-            <a:off x="4429760" y="5706378"/>
-            <a:ext cx="3332478" cy="365252"/>
+            <a:off x="2057405" y="5425453"/>
+            <a:ext cx="3346088" cy="332232"/>
           </a:xfrm>
           <a:prstGeom prst="rect">
             <a:avLst/>
@@ -9051,20 +9246,20 @@
           <a:noFill/>
         </p:spPr>
         <p:txBody>
-          <a:bodyPr wrap="square" lIns="0" rIns="0" tIns="0" bIns="0" anchor="t">
+          <a:bodyPr wrap="square" lIns="0" rIns="0" tIns="0" bIns="0" anchor="ctr">
             <a:spAutoFit/>
           </a:bodyPr>
           <a:lstStyle/>
           <a:p>
             <a:pPr algn="l">
               <a:lnSpc>
-                <a:spcPct val="130000"/>
+                <a:spcPct val="124000"/>
               </a:lnSpc>
             </a:pPr>
             <a:r>
-              <a:rPr sz="1100" b="0" i="0">
-                <a:solidFill>
-                  <a:srgbClr val="16283F"/>
+              <a:rPr sz="850" b="0" i="0">
+                <a:solidFill>
+                  <a:srgbClr val="4E6584"/>
                 </a:solidFill>
                 <a:latin typeface="Arial"/>
                 <a:ea typeface="微软雅黑"/>
@@ -9077,14 +9272,14 @@
       </p:sp>
       <p:sp>
         <p:nvSpPr>
-          <p:cNvPr id="37" name="Rounded Rectangle 36"/>
+          <p:cNvPr id="43" name="Rounded Rectangle 42"/>
           <p:cNvSpPr/>
           <p:nvPr/>
         </p:nvSpPr>
         <p:spPr>
           <a:xfrm>
-            <a:off x="8054847" y="5176024"/>
-            <a:ext cx="3625086" cy="1005334"/>
+            <a:off x="512065" y="5803406"/>
+            <a:ext cx="5019444" cy="332232"/>
           </a:xfrm>
           <a:prstGeom prst="roundRect">
             <a:avLst>
@@ -9123,14 +9318,14 @@
       </p:sp>
       <p:sp>
         <p:nvSpPr>
-          <p:cNvPr id="38" name="TextBox 37"/>
+          <p:cNvPr id="44" name="TextBox 43"/>
           <p:cNvSpPr txBox="1"/>
           <p:nvPr/>
         </p:nvSpPr>
         <p:spPr>
           <a:xfrm>
-            <a:off x="8201152" y="5285753"/>
-            <a:ext cx="3332478" cy="384048"/>
+            <a:off x="640081" y="5803406"/>
+            <a:ext cx="1417323" cy="332232"/>
           </a:xfrm>
           <a:prstGeom prst="rect">
             <a:avLst/>
@@ -9138,18 +9333,18 @@
           <a:noFill/>
         </p:spPr>
         <p:txBody>
-          <a:bodyPr wrap="square" lIns="0" rIns="0" tIns="0" bIns="0" anchor="t">
+          <a:bodyPr wrap="square" lIns="0" rIns="0" tIns="0" bIns="0" anchor="ctr">
             <a:spAutoFit/>
           </a:bodyPr>
           <a:lstStyle/>
           <a:p>
             <a:pPr algn="l">
               <a:lnSpc>
-                <a:spcPct val="120000"/>
+                <a:spcPct val="128000"/>
               </a:lnSpc>
             </a:pPr>
             <a:r>
-              <a:rPr sz="1250" b="1" i="0">
+              <a:rPr sz="950" b="1" i="0">
                 <a:solidFill>
                   <a:srgbClr val="003669"/>
                 </a:solidFill>
@@ -9164,14 +9359,14 @@
       </p:sp>
       <p:sp>
         <p:nvSpPr>
-          <p:cNvPr id="39" name="TextBox 38"/>
+          <p:cNvPr id="45" name="TextBox 44"/>
           <p:cNvSpPr txBox="1"/>
           <p:nvPr/>
         </p:nvSpPr>
         <p:spPr>
           <a:xfrm>
-            <a:off x="8201152" y="5706378"/>
-            <a:ext cx="3332478" cy="365252"/>
+            <a:off x="2057405" y="5803406"/>
+            <a:ext cx="3346088" cy="332232"/>
           </a:xfrm>
           <a:prstGeom prst="rect">
             <a:avLst/>
@@ -9179,20 +9374,20 @@
           <a:noFill/>
         </p:spPr>
         <p:txBody>
-          <a:bodyPr wrap="square" lIns="0" rIns="0" tIns="0" bIns="0" anchor="t">
+          <a:bodyPr wrap="square" lIns="0" rIns="0" tIns="0" bIns="0" anchor="ctr">
             <a:spAutoFit/>
           </a:bodyPr>
           <a:lstStyle/>
           <a:p>
             <a:pPr algn="l">
               <a:lnSpc>
-                <a:spcPct val="130000"/>
+                <a:spcPct val="124000"/>
               </a:lnSpc>
             </a:pPr>
             <a:r>
-              <a:rPr sz="1100" b="0" i="0">
-                <a:solidFill>
-                  <a:srgbClr val="16283F"/>
+              <a:rPr sz="850" b="0" i="0">
+                <a:solidFill>
+                  <a:srgbClr val="4E6584"/>
                 </a:solidFill>
                 <a:latin typeface="Arial"/>
                 <a:ea typeface="微软雅黑"/>
@@ -9205,14 +9400,14 @@
       </p:sp>
       <p:sp>
         <p:nvSpPr>
-          <p:cNvPr id="40" name="TextBox 39"/>
+          <p:cNvPr id="46" name="TextBox 45"/>
           <p:cNvSpPr txBox="1"/>
           <p:nvPr/>
         </p:nvSpPr>
         <p:spPr>
           <a:xfrm>
-            <a:off x="512065" y="6309375"/>
-            <a:ext cx="9875544" cy="182880"/>
+            <a:off x="5787542" y="1097282"/>
+            <a:ext cx="5892391" cy="237744"/>
           </a:xfrm>
           <a:prstGeom prst="rect">
             <a:avLst/>
@@ -9231,129 +9426,29 @@
               </a:lnSpc>
             </a:pPr>
             <a:r>
-              <a:rPr sz="900" b="0" i="0">
-                <a:solidFill>
-                  <a:srgbClr val="4E6584"/>
+              <a:rPr sz="1600" b="1" i="0">
+                <a:solidFill>
+                  <a:srgbClr val="003669"/>
                 </a:solidFill>
                 <a:latin typeface="Arial"/>
                 <a:ea typeface="微软雅黑"/>
                 <a:cs typeface="Arial"/>
               </a:rPr>
-              <a:t>数据来自设备管理系统汇报材料</a:t>
-            </a:r>
-          </a:p>
-        </p:txBody>
-      </p:sp>
-      <p:sp>
-        <p:nvSpPr>
-          <p:cNvPr id="41" name="TextBox 40"/>
+              <a:t>巡检管理系统</a:t>
+            </a:r>
+          </a:p>
+        </p:txBody>
+      </p:sp>
+      <p:sp>
+        <p:nvSpPr>
+          <p:cNvPr id="47" name="TextBox 46"/>
           <p:cNvSpPr txBox="1"/>
           <p:nvPr/>
         </p:nvSpPr>
         <p:spPr>
           <a:xfrm>
-            <a:off x="10515626" y="6309375"/>
-            <a:ext cx="731521" cy="182880"/>
-          </a:xfrm>
-          <a:prstGeom prst="rect">
-            <a:avLst/>
-          </a:prstGeom>
-          <a:noFill/>
-        </p:spPr>
-        <p:txBody>
-          <a:bodyPr wrap="square" lIns="0" rIns="0" tIns="0" bIns="0" anchor="t">
-            <a:spAutoFit/>
-          </a:bodyPr>
-          <a:lstStyle/>
-          <a:p>
-            <a:pPr algn="r">
-              <a:lnSpc>
-                <a:spcPct val="128000"/>
-              </a:lnSpc>
-            </a:pPr>
-            <a:r>
-              <a:rPr sz="900" b="0" i="0">
-                <a:solidFill>
-                  <a:srgbClr val="4E6584"/>
-                </a:solidFill>
-                <a:latin typeface="Arial"/>
-                <a:ea typeface="微软雅黑"/>
-                <a:cs typeface="Arial"/>
-              </a:rPr>
-              <a:t>1 / 2</a:t>
-            </a:r>
-          </a:p>
-        </p:txBody>
-      </p:sp>
-    </p:spTree>
-  </p:cSld>
-  <p:clrMapOvr>
-    <a:masterClrMapping/>
-  </p:clrMapOvr>
-</p:sld>
-</file>
-
-<file path=ppt/slides/slide2.xml><?xml version="1.0" encoding="utf-8"?>
-<p:sld xmlns:a="http://schemas.openxmlformats.org/drawingml/2006/main" xmlns:p="http://schemas.openxmlformats.org/presentationml/2006/main" xmlns:r="http://schemas.openxmlformats.org/officeDocument/2006/relationships">
-  <p:cSld>
-    <p:spTree>
-      <p:nvGrpSpPr>
-        <p:cNvPr id="1" name=""/>
-        <p:cNvGrpSpPr/>
-        <p:nvPr/>
-      </p:nvGrpSpPr>
-      <p:grpSpPr/>
-      <p:sp>
-        <p:nvSpPr>
-          <p:cNvPr id="2" name="TextBox 1"/>
-          <p:cNvSpPr txBox="1"/>
-          <p:nvPr/>
-        </p:nvSpPr>
-        <p:spPr>
-          <a:xfrm>
-            <a:off x="512065" y="1097282"/>
-            <a:ext cx="11167869" cy="366268"/>
-          </a:xfrm>
-          <a:prstGeom prst="rect">
-            <a:avLst/>
-          </a:prstGeom>
-          <a:noFill/>
-        </p:spPr>
-        <p:txBody>
-          <a:bodyPr wrap="square" lIns="0" rIns="0" tIns="0" bIns="0" anchor="t">
-            <a:spAutoFit/>
-          </a:bodyPr>
-          <a:lstStyle/>
-          <a:p>
-            <a:pPr algn="l">
-              <a:lnSpc>
-                <a:spcPct val="118000"/>
-              </a:lnSpc>
-            </a:pPr>
-            <a:r>
-              <a:rPr sz="2200" b="1" i="0">
-                <a:solidFill>
-                  <a:srgbClr val="16283F"/>
-                </a:solidFill>
-                <a:latin typeface="Arial"/>
-                <a:ea typeface="微软雅黑"/>
-                <a:cs typeface="Arial"/>
-              </a:rPr>
-              <a:t>巡检管理系统：隐患台账已归集 3.5 万余条</a:t>
-            </a:r>
-          </a:p>
-        </p:txBody>
-      </p:sp>
-      <p:sp>
-        <p:nvSpPr>
-          <p:cNvPr id="3" name="TextBox 2"/>
-          <p:cNvSpPr txBox="1"/>
-          <p:nvPr/>
-        </p:nvSpPr>
-        <p:spPr>
-          <a:xfrm>
-            <a:off x="512065" y="1609856"/>
-            <a:ext cx="11167869" cy="201168"/>
+            <a:off x="5787542" y="1353315"/>
+            <a:ext cx="5892391" cy="182880"/>
           </a:xfrm>
           <a:prstGeom prst="rect">
             <a:avLst/>
@@ -9372,7 +9467,7 @@
               </a:lnSpc>
             </a:pPr>
             <a:r>
-              <a:rPr sz="1100" b="1" i="0">
+              <a:rPr sz="950" b="1" i="0">
                 <a:solidFill>
                   <a:srgbClr val="4E6584"/>
                 </a:solidFill>
@@ -9387,14 +9482,14 @@
       </p:sp>
       <p:sp>
         <p:nvSpPr>
-          <p:cNvPr id="4" name="Rectangle 3"/>
+          <p:cNvPr id="48" name="Rectangle 47"/>
           <p:cNvSpPr/>
           <p:nvPr/>
         </p:nvSpPr>
         <p:spPr>
           <a:xfrm>
-            <a:off x="512065" y="1902464"/>
-            <a:ext cx="50292" cy="201168"/>
+            <a:off x="5787542" y="1609348"/>
+            <a:ext cx="50292" cy="182880"/>
           </a:xfrm>
           <a:prstGeom prst="rect">
             <a:avLst/>
@@ -9431,14 +9526,14 @@
       </p:sp>
       <p:sp>
         <p:nvSpPr>
-          <p:cNvPr id="5" name="TextBox 4"/>
+          <p:cNvPr id="49" name="TextBox 48"/>
           <p:cNvSpPr txBox="1"/>
           <p:nvPr/>
         </p:nvSpPr>
         <p:spPr>
           <a:xfrm>
-            <a:off x="658369" y="1884176"/>
-            <a:ext cx="6182560" cy="237744"/>
+            <a:off x="5933847" y="1591059"/>
+            <a:ext cx="5746087" cy="219456"/>
           </a:xfrm>
           <a:prstGeom prst="rect">
             <a:avLst/>
@@ -9457,7 +9552,7 @@
               </a:lnSpc>
             </a:pPr>
             <a:r>
-              <a:rPr sz="1400" b="1" i="0">
+              <a:rPr sz="1300" b="1" i="0">
                 <a:solidFill>
                   <a:srgbClr val="003669"/>
                 </a:solidFill>
@@ -9472,14 +9567,14 @@
       </p:sp>
       <p:sp>
         <p:nvSpPr>
-          <p:cNvPr id="6" name="Rounded Rectangle 5"/>
+          <p:cNvPr id="50" name="Rounded Rectangle 49"/>
           <p:cNvSpPr/>
           <p:nvPr/>
         </p:nvSpPr>
         <p:spPr>
           <a:xfrm>
-            <a:off x="512065" y="2195073"/>
-            <a:ext cx="6328865" cy="2855975"/>
+            <a:off x="5787542" y="1847092"/>
+            <a:ext cx="5892391" cy="2667840"/>
           </a:xfrm>
           <a:prstGeom prst="roundRect">
             <a:avLst>
@@ -9520,7 +9615,7 @@
       </p:sp>
       <p:pic>
         <p:nvPicPr>
-          <p:cNvPr id="7" name="Picture 6" descr="巡检管理系统.png"/>
+          <p:cNvPr id="51" name="Picture 50" descr="巡检管理系统.png"/>
           <p:cNvPicPr>
             <a:picLocks noChangeAspect="1"/>
           </p:cNvPicPr>
@@ -9534,8 +9629,8 @@
         </p:blipFill>
         <p:spPr>
           <a:xfrm>
-            <a:off x="576073" y="2286671"/>
-            <a:ext cx="6200849" cy="2672779"/>
+            <a:off x="5860695" y="1942631"/>
+            <a:ext cx="5746087" cy="2476761"/>
           </a:xfrm>
           <a:prstGeom prst="rect">
             <a:avLst/>
@@ -9544,14 +9639,14 @@
       </p:pic>
       <p:sp>
         <p:nvSpPr>
-          <p:cNvPr id="8" name="TextBox 7"/>
+          <p:cNvPr id="52" name="TextBox 51"/>
           <p:cNvSpPr txBox="1"/>
           <p:nvPr/>
         </p:nvSpPr>
         <p:spPr>
           <a:xfrm>
-            <a:off x="512065" y="5105913"/>
-            <a:ext cx="6328865" cy="256032"/>
+            <a:off x="5787542" y="4588085"/>
+            <a:ext cx="5892391" cy="237744"/>
           </a:xfrm>
           <a:prstGeom prst="rect">
             <a:avLst/>
@@ -9566,11 +9661,11 @@
           <a:p>
             <a:pPr algn="l">
               <a:lnSpc>
-                <a:spcPct val="125000"/>
+                <a:spcPct val="128000"/>
               </a:lnSpc>
             </a:pPr>
             <a:r>
-              <a:rPr sz="1000" b="0" i="0">
+              <a:rPr sz="900" b="0" i="0">
                 <a:solidFill>
                   <a:srgbClr val="4E6584"/>
                 </a:solidFill>
@@ -9585,58 +9680,14 @@
       </p:sp>
       <p:sp>
         <p:nvSpPr>
-          <p:cNvPr id="9" name="Rectangle 8"/>
-          <p:cNvSpPr/>
-          <p:nvPr/>
-        </p:nvSpPr>
-        <p:spPr>
-          <a:xfrm>
-            <a:off x="7096963" y="1902464"/>
-            <a:ext cx="50292" cy="201168"/>
-          </a:xfrm>
-          <a:prstGeom prst="rect">
-            <a:avLst/>
-          </a:prstGeom>
-          <a:solidFill>
-            <a:srgbClr val="C8880C"/>
-          </a:solidFill>
-          <a:ln>
-            <a:noFill/>
-          </a:ln>
-          <a:effectLst/>
-        </p:spPr>
-        <p:style>
-          <a:lnRef idx="1">
-            <a:schemeClr val="accent1"/>
-          </a:lnRef>
-          <a:fillRef idx="3">
-            <a:schemeClr val="accent1"/>
-          </a:fillRef>
-          <a:effectRef idx="2">
-            <a:schemeClr val="accent1"/>
-          </a:effectRef>
-          <a:fontRef idx="minor">
-            <a:schemeClr val="lt1"/>
-          </a:fontRef>
-        </p:style>
-        <p:txBody>
-          <a:bodyPr rtlCol="0" anchor="ctr" wrap="square"/>
-          <a:lstStyle/>
-          <a:p>
-            <a:pPr algn="ctr"/>
-          </a:p>
-        </p:txBody>
-      </p:sp>
-      <p:sp>
-        <p:nvSpPr>
-          <p:cNvPr id="10" name="TextBox 9"/>
+          <p:cNvPr id="53" name="TextBox 52"/>
           <p:cNvSpPr txBox="1"/>
           <p:nvPr/>
         </p:nvSpPr>
         <p:spPr>
           <a:xfrm>
-            <a:off x="7243267" y="1884176"/>
-            <a:ext cx="4436667" cy="237744"/>
+            <a:off x="512065" y="6309375"/>
+            <a:ext cx="11164851" cy="182880"/>
           </a:xfrm>
           <a:prstGeom prst="rect">
             <a:avLst/>
@@ -9655,785 +9706,15 @@
               </a:lnSpc>
             </a:pPr>
             <a:r>
-              <a:rPr sz="1400" b="1" i="0">
-                <a:solidFill>
-                  <a:srgbClr val="003669"/>
+              <a:rPr sz="850" b="0" i="0">
+                <a:solidFill>
+                  <a:srgbClr val="4E6584"/>
                 </a:solidFill>
                 <a:latin typeface="Arial"/>
                 <a:ea typeface="微软雅黑"/>
                 <a:cs typeface="Arial"/>
               </a:rPr>
-              <a:t>系统能力</a:t>
-            </a:r>
-          </a:p>
-        </p:txBody>
-      </p:sp>
-      <p:sp>
-        <p:nvSpPr>
-          <p:cNvPr id="11" name="Rounded Rectangle 10"/>
-          <p:cNvSpPr/>
-          <p:nvPr/>
-        </p:nvSpPr>
-        <p:spPr>
-          <a:xfrm>
-            <a:off x="7096963" y="2213361"/>
-            <a:ext cx="4582971" cy="909703"/>
-          </a:xfrm>
-          <a:prstGeom prst="roundRect">
-            <a:avLst>
-              <a:gd name="adj" fmla="val 4500"/>
-            </a:avLst>
-          </a:prstGeom>
-          <a:solidFill>
-            <a:srgbClr val="EEF3FA"/>
-          </a:solidFill>
-          <a:ln>
-            <a:noFill/>
-          </a:ln>
-          <a:effectLst/>
-        </p:spPr>
-        <p:style>
-          <a:lnRef idx="1">
-            <a:schemeClr val="accent1"/>
-          </a:lnRef>
-          <a:fillRef idx="3">
-            <a:schemeClr val="accent1"/>
-          </a:fillRef>
-          <a:effectRef idx="2">
-            <a:schemeClr val="accent1"/>
-          </a:effectRef>
-          <a:fontRef idx="minor">
-            <a:schemeClr val="lt1"/>
-          </a:fontRef>
-        </p:style>
-        <p:txBody>
-          <a:bodyPr rtlCol="0" anchor="ctr" wrap="square"/>
-          <a:lstStyle/>
-          <a:p>
-            <a:pPr algn="ctr"/>
-          </a:p>
-        </p:txBody>
-      </p:sp>
-      <p:sp>
-        <p:nvSpPr>
-          <p:cNvPr id="12" name="Rectangle 11"/>
-          <p:cNvSpPr/>
-          <p:nvPr/>
-        </p:nvSpPr>
-        <p:spPr>
-          <a:xfrm>
-            <a:off x="7243267" y="2341377"/>
-            <a:ext cx="45720" cy="182880"/>
-          </a:xfrm>
-          <a:prstGeom prst="rect">
-            <a:avLst/>
-          </a:prstGeom>
-          <a:solidFill>
-            <a:srgbClr val="3263A7"/>
-          </a:solidFill>
-          <a:ln>
-            <a:noFill/>
-          </a:ln>
-          <a:effectLst/>
-        </p:spPr>
-        <p:style>
-          <a:lnRef idx="1">
-            <a:schemeClr val="accent1"/>
-          </a:lnRef>
-          <a:fillRef idx="3">
-            <a:schemeClr val="accent1"/>
-          </a:fillRef>
-          <a:effectRef idx="2">
-            <a:schemeClr val="accent1"/>
-          </a:effectRef>
-          <a:fontRef idx="minor">
-            <a:schemeClr val="lt1"/>
-          </a:fontRef>
-        </p:style>
-        <p:txBody>
-          <a:bodyPr rtlCol="0" anchor="ctr" wrap="square"/>
-          <a:lstStyle/>
-          <a:p>
-            <a:pPr algn="ctr"/>
-          </a:p>
-        </p:txBody>
-      </p:sp>
-      <p:sp>
-        <p:nvSpPr>
-          <p:cNvPr id="13" name="TextBox 12"/>
-          <p:cNvSpPr txBox="1"/>
-          <p:nvPr/>
-        </p:nvSpPr>
-        <p:spPr>
-          <a:xfrm>
-            <a:off x="7371283" y="2304801"/>
-            <a:ext cx="4162346" cy="256032"/>
-          </a:xfrm>
-          <a:prstGeom prst="rect">
-            <a:avLst/>
-          </a:prstGeom>
-          <a:noFill/>
-        </p:spPr>
-        <p:txBody>
-          <a:bodyPr wrap="square" lIns="0" rIns="0" tIns="0" bIns="0" anchor="t">
-            <a:spAutoFit/>
-          </a:bodyPr>
-          <a:lstStyle/>
-          <a:p>
-            <a:pPr algn="l">
-              <a:lnSpc>
-                <a:spcPct val="128000"/>
-              </a:lnSpc>
-            </a:pPr>
-            <a:r>
-              <a:rPr sz="1300" b="1" i="0">
-                <a:solidFill>
-                  <a:srgbClr val="003669"/>
-                </a:solidFill>
-                <a:latin typeface="Arial"/>
-                <a:ea typeface="微软雅黑"/>
-                <a:cs typeface="Arial"/>
-              </a:rPr>
-              <a:t>隐患全过程留痕</a:t>
-            </a:r>
-          </a:p>
-        </p:txBody>
-      </p:sp>
-      <p:sp>
-        <p:nvSpPr>
-          <p:cNvPr id="14" name="TextBox 13"/>
-          <p:cNvSpPr txBox="1"/>
-          <p:nvPr/>
-        </p:nvSpPr>
-        <p:spPr>
-          <a:xfrm>
-            <a:off x="7243267" y="2597410"/>
-            <a:ext cx="4290362" cy="434214"/>
-          </a:xfrm>
-          <a:prstGeom prst="rect">
-            <a:avLst/>
-          </a:prstGeom>
-          <a:noFill/>
-        </p:spPr>
-        <p:txBody>
-          <a:bodyPr wrap="square" lIns="0" rIns="0" tIns="0" bIns="0" anchor="t">
-            <a:spAutoFit/>
-          </a:bodyPr>
-          <a:lstStyle/>
-          <a:p>
-            <a:pPr algn="l">
-              <a:lnSpc>
-                <a:spcPct val="130000"/>
-              </a:lnSpc>
-            </a:pPr>
-            <a:r>
-              <a:rPr sz="1100" b="0" i="0">
-                <a:solidFill>
-                  <a:srgbClr val="16283F"/>
-                </a:solidFill>
-                <a:latin typeface="Arial"/>
-                <a:ea typeface="微软雅黑"/>
-                <a:cs typeface="Arial"/>
-              </a:rPr>
-              <a:t>逐条记录巡查主题、组织部门、巡查人、隐患地点、巡查发现、隐患分类与隐患等级</a:t>
-            </a:r>
-          </a:p>
-        </p:txBody>
-      </p:sp>
-      <p:sp>
-        <p:nvSpPr>
-          <p:cNvPr id="15" name="Rounded Rectangle 14"/>
-          <p:cNvSpPr/>
-          <p:nvPr/>
-        </p:nvSpPr>
-        <p:spPr>
-          <a:xfrm>
-            <a:off x="7096963" y="3232793"/>
-            <a:ext cx="4582971" cy="909703"/>
-          </a:xfrm>
-          <a:prstGeom prst="roundRect">
-            <a:avLst>
-              <a:gd name="adj" fmla="val 4500"/>
-            </a:avLst>
-          </a:prstGeom>
-          <a:solidFill>
-            <a:srgbClr val="EEF3FA"/>
-          </a:solidFill>
-          <a:ln>
-            <a:noFill/>
-          </a:ln>
-          <a:effectLst/>
-        </p:spPr>
-        <p:style>
-          <a:lnRef idx="1">
-            <a:schemeClr val="accent1"/>
-          </a:lnRef>
-          <a:fillRef idx="3">
-            <a:schemeClr val="accent1"/>
-          </a:fillRef>
-          <a:effectRef idx="2">
-            <a:schemeClr val="accent1"/>
-          </a:effectRef>
-          <a:fontRef idx="minor">
-            <a:schemeClr val="lt1"/>
-          </a:fontRef>
-        </p:style>
-        <p:txBody>
-          <a:bodyPr rtlCol="0" anchor="ctr" wrap="square"/>
-          <a:lstStyle/>
-          <a:p>
-            <a:pPr algn="ctr"/>
-          </a:p>
-        </p:txBody>
-      </p:sp>
-      <p:sp>
-        <p:nvSpPr>
-          <p:cNvPr id="16" name="Rectangle 15"/>
-          <p:cNvSpPr/>
-          <p:nvPr/>
-        </p:nvSpPr>
-        <p:spPr>
-          <a:xfrm>
-            <a:off x="7243267" y="3360809"/>
-            <a:ext cx="45720" cy="182880"/>
-          </a:xfrm>
-          <a:prstGeom prst="rect">
-            <a:avLst/>
-          </a:prstGeom>
-          <a:solidFill>
-            <a:srgbClr val="3263A7"/>
-          </a:solidFill>
-          <a:ln>
-            <a:noFill/>
-          </a:ln>
-          <a:effectLst/>
-        </p:spPr>
-        <p:style>
-          <a:lnRef idx="1">
-            <a:schemeClr val="accent1"/>
-          </a:lnRef>
-          <a:fillRef idx="3">
-            <a:schemeClr val="accent1"/>
-          </a:fillRef>
-          <a:effectRef idx="2">
-            <a:schemeClr val="accent1"/>
-          </a:effectRef>
-          <a:fontRef idx="minor">
-            <a:schemeClr val="lt1"/>
-          </a:fontRef>
-        </p:style>
-        <p:txBody>
-          <a:bodyPr rtlCol="0" anchor="ctr" wrap="square"/>
-          <a:lstStyle/>
-          <a:p>
-            <a:pPr algn="ctr"/>
-          </a:p>
-        </p:txBody>
-      </p:sp>
-      <p:sp>
-        <p:nvSpPr>
-          <p:cNvPr id="17" name="TextBox 16"/>
-          <p:cNvSpPr txBox="1"/>
-          <p:nvPr/>
-        </p:nvSpPr>
-        <p:spPr>
-          <a:xfrm>
-            <a:off x="7371283" y="3324233"/>
-            <a:ext cx="4162346" cy="256032"/>
-          </a:xfrm>
-          <a:prstGeom prst="rect">
-            <a:avLst/>
-          </a:prstGeom>
-          <a:noFill/>
-        </p:spPr>
-        <p:txBody>
-          <a:bodyPr wrap="square" lIns="0" rIns="0" tIns="0" bIns="0" anchor="t">
-            <a:spAutoFit/>
-          </a:bodyPr>
-          <a:lstStyle/>
-          <a:p>
-            <a:pPr algn="l">
-              <a:lnSpc>
-                <a:spcPct val="128000"/>
-              </a:lnSpc>
-            </a:pPr>
-            <a:r>
-              <a:rPr sz="1300" b="1" i="0">
-                <a:solidFill>
-                  <a:srgbClr val="003669"/>
-                </a:solidFill>
-                <a:latin typeface="Arial"/>
-                <a:ea typeface="微软雅黑"/>
-                <a:cs typeface="Arial"/>
-              </a:rPr>
-              <a:t>三类巡查统一入口</a:t>
-            </a:r>
-          </a:p>
-        </p:txBody>
-      </p:sp>
-      <p:sp>
-        <p:nvSpPr>
-          <p:cNvPr id="18" name="TextBox 17"/>
-          <p:cNvSpPr txBox="1"/>
-          <p:nvPr/>
-        </p:nvSpPr>
-        <p:spPr>
-          <a:xfrm>
-            <a:off x="7243267" y="3616842"/>
-            <a:ext cx="4290362" cy="434214"/>
-          </a:xfrm>
-          <a:prstGeom prst="rect">
-            <a:avLst/>
-          </a:prstGeom>
-          <a:noFill/>
-        </p:spPr>
-        <p:txBody>
-          <a:bodyPr wrap="square" lIns="0" rIns="0" tIns="0" bIns="0" anchor="t">
-            <a:spAutoFit/>
-          </a:bodyPr>
-          <a:lstStyle/>
-          <a:p>
-            <a:pPr algn="l">
-              <a:lnSpc>
-                <a:spcPct val="130000"/>
-              </a:lnSpc>
-            </a:pPr>
-            <a:r>
-              <a:rPr sz="1100" b="0" i="0">
-                <a:solidFill>
-                  <a:srgbClr val="16283F"/>
-                </a:solidFill>
-                <a:latin typeface="Arial"/>
-                <a:ea typeface="微软雅黑"/>
-                <a:cs typeface="Arial"/>
-              </a:rPr>
-              <a:t>EHS 隐患排查、QA 日常巡查、生产日常巡查在同一系统内管理</a:t>
-            </a:r>
-          </a:p>
-        </p:txBody>
-      </p:sp>
-      <p:sp>
-        <p:nvSpPr>
-          <p:cNvPr id="19" name="Rounded Rectangle 18"/>
-          <p:cNvSpPr/>
-          <p:nvPr/>
-        </p:nvSpPr>
-        <p:spPr>
-          <a:xfrm>
-            <a:off x="7096963" y="4252224"/>
-            <a:ext cx="4582971" cy="909703"/>
-          </a:xfrm>
-          <a:prstGeom prst="roundRect">
-            <a:avLst>
-              <a:gd name="adj" fmla="val 4500"/>
-            </a:avLst>
-          </a:prstGeom>
-          <a:solidFill>
-            <a:srgbClr val="EEF3FA"/>
-          </a:solidFill>
-          <a:ln>
-            <a:noFill/>
-          </a:ln>
-          <a:effectLst/>
-        </p:spPr>
-        <p:style>
-          <a:lnRef idx="1">
-            <a:schemeClr val="accent1"/>
-          </a:lnRef>
-          <a:fillRef idx="3">
-            <a:schemeClr val="accent1"/>
-          </a:fillRef>
-          <a:effectRef idx="2">
-            <a:schemeClr val="accent1"/>
-          </a:effectRef>
-          <a:fontRef idx="minor">
-            <a:schemeClr val="lt1"/>
-          </a:fontRef>
-        </p:style>
-        <p:txBody>
-          <a:bodyPr rtlCol="0" anchor="ctr" wrap="square"/>
-          <a:lstStyle/>
-          <a:p>
-            <a:pPr algn="ctr"/>
-          </a:p>
-        </p:txBody>
-      </p:sp>
-      <p:sp>
-        <p:nvSpPr>
-          <p:cNvPr id="20" name="Rectangle 19"/>
-          <p:cNvSpPr/>
-          <p:nvPr/>
-        </p:nvSpPr>
-        <p:spPr>
-          <a:xfrm>
-            <a:off x="7243267" y="4380240"/>
-            <a:ext cx="45720" cy="182880"/>
-          </a:xfrm>
-          <a:prstGeom prst="rect">
-            <a:avLst/>
-          </a:prstGeom>
-          <a:solidFill>
-            <a:srgbClr val="3263A7"/>
-          </a:solidFill>
-          <a:ln>
-            <a:noFill/>
-          </a:ln>
-          <a:effectLst/>
-        </p:spPr>
-        <p:style>
-          <a:lnRef idx="1">
-            <a:schemeClr val="accent1"/>
-          </a:lnRef>
-          <a:fillRef idx="3">
-            <a:schemeClr val="accent1"/>
-          </a:fillRef>
-          <a:effectRef idx="2">
-            <a:schemeClr val="accent1"/>
-          </a:effectRef>
-          <a:fontRef idx="minor">
-            <a:schemeClr val="lt1"/>
-          </a:fontRef>
-        </p:style>
-        <p:txBody>
-          <a:bodyPr rtlCol="0" anchor="ctr" wrap="square"/>
-          <a:lstStyle/>
-          <a:p>
-            <a:pPr algn="ctr"/>
-          </a:p>
-        </p:txBody>
-      </p:sp>
-      <p:sp>
-        <p:nvSpPr>
-          <p:cNvPr id="21" name="TextBox 20"/>
-          <p:cNvSpPr txBox="1"/>
-          <p:nvPr/>
-        </p:nvSpPr>
-        <p:spPr>
-          <a:xfrm>
-            <a:off x="7371283" y="4343664"/>
-            <a:ext cx="4162346" cy="256032"/>
-          </a:xfrm>
-          <a:prstGeom prst="rect">
-            <a:avLst/>
-          </a:prstGeom>
-          <a:noFill/>
-        </p:spPr>
-        <p:txBody>
-          <a:bodyPr wrap="square" lIns="0" rIns="0" tIns="0" bIns="0" anchor="t">
-            <a:spAutoFit/>
-          </a:bodyPr>
-          <a:lstStyle/>
-          <a:p>
-            <a:pPr algn="l">
-              <a:lnSpc>
-                <a:spcPct val="128000"/>
-              </a:lnSpc>
-            </a:pPr>
-            <a:r>
-              <a:rPr sz="1300" b="1" i="0">
-                <a:solidFill>
-                  <a:srgbClr val="003669"/>
-                </a:solidFill>
-                <a:latin typeface="Arial"/>
-                <a:ea typeface="微软雅黑"/>
-                <a:cs typeface="Arial"/>
-              </a:rPr>
-              <a:t>多维度统计分析</a:t>
-            </a:r>
-          </a:p>
-        </p:txBody>
-      </p:sp>
-      <p:sp>
-        <p:nvSpPr>
-          <p:cNvPr id="22" name="TextBox 21"/>
-          <p:cNvSpPr txBox="1"/>
-          <p:nvPr/>
-        </p:nvSpPr>
-        <p:spPr>
-          <a:xfrm>
-            <a:off x="7243267" y="4636273"/>
-            <a:ext cx="4290362" cy="434214"/>
-          </a:xfrm>
-          <a:prstGeom prst="rect">
-            <a:avLst/>
-          </a:prstGeom>
-          <a:noFill/>
-        </p:spPr>
-        <p:txBody>
-          <a:bodyPr wrap="square" lIns="0" rIns="0" tIns="0" bIns="0" anchor="t">
-            <a:spAutoFit/>
-          </a:bodyPr>
-          <a:lstStyle/>
-          <a:p>
-            <a:pPr algn="l">
-              <a:lnSpc>
-                <a:spcPct val="130000"/>
-              </a:lnSpc>
-            </a:pPr>
-            <a:r>
-              <a:rPr sz="1100" b="0" i="0">
-                <a:solidFill>
-                  <a:srgbClr val="16283F"/>
-                </a:solidFill>
-                <a:latin typeface="Arial"/>
-                <a:ea typeface="微软雅黑"/>
-                <a:cs typeface="Arial"/>
-              </a:rPr>
-              <a:t>支持按厂区、部门、巡查人、整改责任人、第一责任人分别统计</a:t>
-            </a:r>
-          </a:p>
-        </p:txBody>
-      </p:sp>
-      <p:sp>
-        <p:nvSpPr>
-          <p:cNvPr id="23" name="Rounded Rectangle 22"/>
-          <p:cNvSpPr/>
-          <p:nvPr/>
-        </p:nvSpPr>
-        <p:spPr>
-          <a:xfrm>
-            <a:off x="7096963" y="5271656"/>
-            <a:ext cx="4582971" cy="909703"/>
-          </a:xfrm>
-          <a:prstGeom prst="roundRect">
-            <a:avLst>
-              <a:gd name="adj" fmla="val 4500"/>
-            </a:avLst>
-          </a:prstGeom>
-          <a:solidFill>
-            <a:srgbClr val="EEF3FA"/>
-          </a:solidFill>
-          <a:ln>
-            <a:noFill/>
-          </a:ln>
-          <a:effectLst/>
-        </p:spPr>
-        <p:style>
-          <a:lnRef idx="1">
-            <a:schemeClr val="accent1"/>
-          </a:lnRef>
-          <a:fillRef idx="3">
-            <a:schemeClr val="accent1"/>
-          </a:fillRef>
-          <a:effectRef idx="2">
-            <a:schemeClr val="accent1"/>
-          </a:effectRef>
-          <a:fontRef idx="minor">
-            <a:schemeClr val="lt1"/>
-          </a:fontRef>
-        </p:style>
-        <p:txBody>
-          <a:bodyPr rtlCol="0" anchor="ctr" wrap="square"/>
-          <a:lstStyle/>
-          <a:p>
-            <a:pPr algn="ctr"/>
-          </a:p>
-        </p:txBody>
-      </p:sp>
-      <p:sp>
-        <p:nvSpPr>
-          <p:cNvPr id="24" name="Rectangle 23"/>
-          <p:cNvSpPr/>
-          <p:nvPr/>
-        </p:nvSpPr>
-        <p:spPr>
-          <a:xfrm>
-            <a:off x="7243267" y="5399672"/>
-            <a:ext cx="45720" cy="182880"/>
-          </a:xfrm>
-          <a:prstGeom prst="rect">
-            <a:avLst/>
-          </a:prstGeom>
-          <a:solidFill>
-            <a:srgbClr val="3263A7"/>
-          </a:solidFill>
-          <a:ln>
-            <a:noFill/>
-          </a:ln>
-          <a:effectLst/>
-        </p:spPr>
-        <p:style>
-          <a:lnRef idx="1">
-            <a:schemeClr val="accent1"/>
-          </a:lnRef>
-          <a:fillRef idx="3">
-            <a:schemeClr val="accent1"/>
-          </a:fillRef>
-          <a:effectRef idx="2">
-            <a:schemeClr val="accent1"/>
-          </a:effectRef>
-          <a:fontRef idx="minor">
-            <a:schemeClr val="lt1"/>
-          </a:fontRef>
-        </p:style>
-        <p:txBody>
-          <a:bodyPr rtlCol="0" anchor="ctr" wrap="square"/>
-          <a:lstStyle/>
-          <a:p>
-            <a:pPr algn="ctr"/>
-          </a:p>
-        </p:txBody>
-      </p:sp>
-      <p:sp>
-        <p:nvSpPr>
-          <p:cNvPr id="25" name="TextBox 24"/>
-          <p:cNvSpPr txBox="1"/>
-          <p:nvPr/>
-        </p:nvSpPr>
-        <p:spPr>
-          <a:xfrm>
-            <a:off x="7371283" y="5363096"/>
-            <a:ext cx="4162346" cy="256032"/>
-          </a:xfrm>
-          <a:prstGeom prst="rect">
-            <a:avLst/>
-          </a:prstGeom>
-          <a:noFill/>
-        </p:spPr>
-        <p:txBody>
-          <a:bodyPr wrap="square" lIns="0" rIns="0" tIns="0" bIns="0" anchor="t">
-            <a:spAutoFit/>
-          </a:bodyPr>
-          <a:lstStyle/>
-          <a:p>
-            <a:pPr algn="l">
-              <a:lnSpc>
-                <a:spcPct val="128000"/>
-              </a:lnSpc>
-            </a:pPr>
-            <a:r>
-              <a:rPr sz="1300" b="1" i="0">
-                <a:solidFill>
-                  <a:srgbClr val="003669"/>
-                </a:solidFill>
-                <a:latin typeface="Arial"/>
-                <a:ea typeface="微软雅黑"/>
-                <a:cs typeface="Arial"/>
-              </a:rPr>
-              <a:t>计划与任务跟踪</a:t>
-            </a:r>
-          </a:p>
-        </p:txBody>
-      </p:sp>
-      <p:sp>
-        <p:nvSpPr>
-          <p:cNvPr id="26" name="TextBox 25"/>
-          <p:cNvSpPr txBox="1"/>
-          <p:nvPr/>
-        </p:nvSpPr>
-        <p:spPr>
-          <a:xfrm>
-            <a:off x="7243267" y="5655705"/>
-            <a:ext cx="4290362" cy="434214"/>
-          </a:xfrm>
-          <a:prstGeom prst="rect">
-            <a:avLst/>
-          </a:prstGeom>
-          <a:noFill/>
-        </p:spPr>
-        <p:txBody>
-          <a:bodyPr wrap="square" lIns="0" rIns="0" tIns="0" bIns="0" anchor="t">
-            <a:spAutoFit/>
-          </a:bodyPr>
-          <a:lstStyle/>
-          <a:p>
-            <a:pPr algn="l">
-              <a:lnSpc>
-                <a:spcPct val="130000"/>
-              </a:lnSpc>
-            </a:pPr>
-            <a:r>
-              <a:rPr sz="1100" b="0" i="0">
-                <a:solidFill>
-                  <a:srgbClr val="16283F"/>
-                </a:solidFill>
-                <a:latin typeface="Arial"/>
-                <a:ea typeface="微软雅黑"/>
-                <a:cs typeface="Arial"/>
-              </a:rPr>
-              <a:t>巡检计划与巡检任务明细可查，台账截图显示已累计 35,684 条记录</a:t>
-            </a:r>
-          </a:p>
-        </p:txBody>
-      </p:sp>
-      <p:sp>
-        <p:nvSpPr>
-          <p:cNvPr id="27" name="TextBox 26"/>
-          <p:cNvSpPr txBox="1"/>
-          <p:nvPr/>
-        </p:nvSpPr>
-        <p:spPr>
-          <a:xfrm>
-            <a:off x="512065" y="6309375"/>
-            <a:ext cx="9875544" cy="182880"/>
-          </a:xfrm>
-          <a:prstGeom prst="rect">
-            <a:avLst/>
-          </a:prstGeom>
-          <a:noFill/>
-        </p:spPr>
-        <p:txBody>
-          <a:bodyPr wrap="square" lIns="0" rIns="0" tIns="0" bIns="0" anchor="t">
-            <a:spAutoFit/>
-          </a:bodyPr>
-          <a:lstStyle/>
-          <a:p>
-            <a:pPr algn="l">
-              <a:lnSpc>
-                <a:spcPct val="128000"/>
-              </a:lnSpc>
-            </a:pPr>
-            <a:r>
-              <a:rPr sz="900" b="0" i="0">
-                <a:solidFill>
-                  <a:srgbClr val="4E6584"/>
-                </a:solidFill>
-                <a:latin typeface="Arial"/>
-                <a:ea typeface="微软雅黑"/>
-                <a:cs typeface="Arial"/>
-              </a:rPr>
-              <a:t>信息取自巡检管理系统界面截图</a:t>
-            </a:r>
-          </a:p>
-        </p:txBody>
-      </p:sp>
-      <p:sp>
-        <p:nvSpPr>
-          <p:cNvPr id="28" name="TextBox 27"/>
-          <p:cNvSpPr txBox="1"/>
-          <p:nvPr/>
-        </p:nvSpPr>
-        <p:spPr>
-          <a:xfrm>
-            <a:off x="10515626" y="6309375"/>
-            <a:ext cx="731521" cy="182880"/>
-          </a:xfrm>
-          <a:prstGeom prst="rect">
-            <a:avLst/>
-          </a:prstGeom>
-          <a:noFill/>
-        </p:spPr>
-        <p:txBody>
-          <a:bodyPr wrap="square" lIns="0" rIns="0" tIns="0" bIns="0" anchor="t">
-            <a:spAutoFit/>
-          </a:bodyPr>
-          <a:lstStyle/>
-          <a:p>
-            <a:pPr algn="r">
-              <a:lnSpc>
-                <a:spcPct val="128000"/>
-              </a:lnSpc>
-            </a:pPr>
-            <a:r>
-              <a:rPr sz="900" b="0" i="0">
-                <a:solidFill>
-                  <a:srgbClr val="4E6584"/>
-                </a:solidFill>
-                <a:latin typeface="Arial"/>
-                <a:ea typeface="微软雅黑"/>
-                <a:cs typeface="Arial"/>
-              </a:rPr>
-              <a:t>2 / 2</a:t>
+              <a:t>设备系统数据来自设备管理系统汇报材料；巡检系统信息取自系统界面截图</a:t>
             </a:r>
           </a:p>
         </p:txBody>
